--- a/reference_material/slides/021_r_squared.pptx
+++ b/reference_material/slides/021_r_squared.pptx
@@ -9,30 +9,32 @@
     <p:sldId id="256" r:id="rId3"/>
     <p:sldId id="258" r:id="rId4"/>
     <p:sldId id="257" r:id="rId5"/>
-    <p:sldId id="259" r:id="rId6"/>
-    <p:sldId id="260" r:id="rId7"/>
-    <p:sldId id="261" r:id="rId8"/>
-    <p:sldId id="263" r:id="rId9"/>
-    <p:sldId id="262" r:id="rId10"/>
-    <p:sldId id="264" r:id="rId11"/>
-    <p:sldId id="265" r:id="rId12"/>
-    <p:sldId id="266" r:id="rId13"/>
-    <p:sldId id="277" r:id="rId14"/>
-    <p:sldId id="267" r:id="rId15"/>
-    <p:sldId id="268" r:id="rId16"/>
-    <p:sldId id="269" r:id="rId17"/>
-    <p:sldId id="270" r:id="rId18"/>
-    <p:sldId id="271" r:id="rId19"/>
-    <p:sldId id="272" r:id="rId20"/>
-    <p:sldId id="273" r:id="rId21"/>
-    <p:sldId id="274" r:id="rId22"/>
-    <p:sldId id="275" r:id="rId23"/>
-    <p:sldId id="278" r:id="rId24"/>
-    <p:sldId id="281" r:id="rId25"/>
-    <p:sldId id="279" r:id="rId26"/>
-    <p:sldId id="280" r:id="rId27"/>
-    <p:sldId id="282" r:id="rId28"/>
-    <p:sldId id="283" r:id="rId29"/>
+    <p:sldId id="285" r:id="rId6"/>
+    <p:sldId id="284" r:id="rId7"/>
+    <p:sldId id="259" r:id="rId8"/>
+    <p:sldId id="260" r:id="rId9"/>
+    <p:sldId id="261" r:id="rId10"/>
+    <p:sldId id="263" r:id="rId11"/>
+    <p:sldId id="262" r:id="rId12"/>
+    <p:sldId id="264" r:id="rId13"/>
+    <p:sldId id="265" r:id="rId14"/>
+    <p:sldId id="266" r:id="rId15"/>
+    <p:sldId id="277" r:id="rId16"/>
+    <p:sldId id="267" r:id="rId17"/>
+    <p:sldId id="268" r:id="rId18"/>
+    <p:sldId id="269" r:id="rId19"/>
+    <p:sldId id="270" r:id="rId20"/>
+    <p:sldId id="271" r:id="rId21"/>
+    <p:sldId id="272" r:id="rId22"/>
+    <p:sldId id="273" r:id="rId23"/>
+    <p:sldId id="274" r:id="rId24"/>
+    <p:sldId id="275" r:id="rId25"/>
+    <p:sldId id="278" r:id="rId26"/>
+    <p:sldId id="281" r:id="rId27"/>
+    <p:sldId id="279" r:id="rId28"/>
+    <p:sldId id="280" r:id="rId29"/>
+    <p:sldId id="282" r:id="rId30"/>
+    <p:sldId id="283" r:id="rId31"/>
   </p:sldIdLst>
   <p:sldSz cx="12192000" cy="6858000"/>
   <p:notesSz cx="6858000" cy="9144000"/>
@@ -3722,6 +3724,21 @@
             <a:pPr lvl="1"/>
             <a:r>
               <a:rPr lang="en-US" dirty="0"/>
+              <a:t>Pull from repository, there are several small errors I fixed (</a:t>
+            </a:r>
+            <a:r>
+              <a:rPr lang="en-US" dirty="0" err="1"/>
+              <a:t>mean_squared_error</a:t>
+            </a:r>
+            <a:r>
+              <a:rPr lang="en-US" dirty="0"/>
+              <a:t> function). </a:t>
+            </a:r>
+          </a:p>
+          <a:p>
+            <a:pPr lvl="1"/>
+            <a:r>
+              <a:rPr lang="en-US" dirty="0"/>
               <a:t>Read chapter 10 and 11 this week. </a:t>
             </a:r>
           </a:p>
@@ -3839,7 +3856,7 @@
           <p:cNvPr id="2" name="Title 1">
             <a:extLst>
               <a:ext uri="{FF2B5EF4-FFF2-40B4-BE49-F238E27FC236}">
-                <a16:creationId xmlns:a16="http://schemas.microsoft.com/office/drawing/2014/main" id="{FACEAAE9-B128-E7B4-808A-E3CB8F5777EB}"/>
+                <a16:creationId xmlns:a16="http://schemas.microsoft.com/office/drawing/2014/main" id="{0B18DCD2-1B99-D357-7072-1F6CD5A1CBC8}"/>
               </a:ext>
             </a:extLst>
           </p:cNvPr>
@@ -3857,7 +3874,7 @@
           <a:p>
             <a:r>
               <a:rPr lang="en-US" dirty="0"/>
-              <a:t>Using R Squared</a:t>
+              <a:t>You can Frame it in Terms of Error as well</a:t>
             </a:r>
           </a:p>
         </p:txBody>
@@ -3867,7 +3884,7 @@
           <p:cNvPr id="3" name="Content Placeholder 2">
             <a:extLst>
               <a:ext uri="{FF2B5EF4-FFF2-40B4-BE49-F238E27FC236}">
-                <a16:creationId xmlns:a16="http://schemas.microsoft.com/office/drawing/2014/main" id="{79BCDDF8-807F-28D3-D8C8-F29A4A39CF1A}"/>
+                <a16:creationId xmlns:a16="http://schemas.microsoft.com/office/drawing/2014/main" id="{67F840EE-F9E4-5677-1216-938AEF04A85A}"/>
               </a:ext>
             </a:extLst>
           </p:cNvPr>
@@ -3880,80 +3897,90 @@
         </p:nvSpPr>
         <p:spPr>
           <a:xfrm>
-            <a:off x="1451579" y="1977656"/>
-            <a:ext cx="9603275" cy="4075825"/>
-          </a:xfrm>
-        </p:spPr>
-        <p:txBody>
-          <a:bodyPr/>
-          <a:lstStyle/>
-          <a:p>
-            <a:r>
-              <a:rPr lang="en-US" dirty="0"/>
-              <a:t>R2 is the most common default metric to score a model. </a:t>
-            </a:r>
-          </a:p>
-          <a:p>
-            <a:pPr lvl="1"/>
-            <a:r>
-              <a:rPr lang="en-US" dirty="0"/>
-              <a:t>Result of score function in sklearn, default value in </a:t>
-            </a:r>
-            <a:r>
-              <a:rPr lang="en-US" dirty="0" err="1"/>
-              <a:t>statsmodels</a:t>
-            </a:r>
-            <a:r>
-              <a:rPr lang="en-US" dirty="0"/>
-              <a:t>. </a:t>
-            </a:r>
-          </a:p>
-          <a:p>
-            <a:pPr lvl="1"/>
-            <a:r>
-              <a:rPr lang="en-US" dirty="0"/>
-              <a:t>We can compare anything, since it is a percentage. Error measures depend on scale. </a:t>
-            </a:r>
-          </a:p>
-          <a:p>
-            <a:r>
-              <a:rPr lang="en-US" dirty="0"/>
-              <a:t>The (1-R2, SSE) variance is what our model doesn’t capture. </a:t>
-            </a:r>
-          </a:p>
-          <a:p>
-            <a:pPr lvl="1"/>
-            <a:r>
-              <a:rPr lang="en-US" dirty="0"/>
-              <a:t>Variables that we don’t have in the model (e.g. h vs w probably has more factors). </a:t>
-            </a:r>
-          </a:p>
-          <a:p>
-            <a:pPr lvl="1"/>
-            <a:r>
-              <a:rPr lang="en-US" dirty="0"/>
-              <a:t>Some things can’t really be embedded into a model easily as a variable. </a:t>
-            </a:r>
-          </a:p>
-          <a:p>
-            <a:pPr lvl="1"/>
-            <a:r>
-              <a:rPr lang="en-US" dirty="0"/>
-              <a:t>Noise or randomness that we fundamentally can’t predict. </a:t>
-            </a:r>
-          </a:p>
-          <a:p>
-            <a:r>
-              <a:rPr lang="en-US" dirty="0"/>
-              <a:t>Adding more inputs can help us capture more things that determine outcome…</a:t>
-            </a:r>
-          </a:p>
-        </p:txBody>
-      </p:sp>
+            <a:off x="8629822" y="2015732"/>
+            <a:ext cx="3319162" cy="3450613"/>
+          </a:xfrm>
+        </p:spPr>
+        <p:txBody>
+          <a:bodyPr/>
+          <a:lstStyle/>
+          <a:p>
+            <a:r>
+              <a:rPr lang="en-US" dirty="0"/>
+              <a:t>Deviation from mean is ‘wrong’. </a:t>
+            </a:r>
+          </a:p>
+          <a:p>
+            <a:r>
+              <a:rPr lang="en-US" dirty="0"/>
+              <a:t>Some error is captured by model. </a:t>
+            </a:r>
+          </a:p>
+          <a:p>
+            <a:r>
+              <a:rPr lang="en-US" dirty="0"/>
+              <a:t>The rest is residual. </a:t>
+            </a:r>
+          </a:p>
+          <a:p>
+            <a:r>
+              <a:rPr lang="en-US" dirty="0"/>
+              <a:t>I don’t like this thought model, personally. </a:t>
+            </a:r>
+          </a:p>
+        </p:txBody>
+      </p:sp>
+      <p:pic>
+        <p:nvPicPr>
+          <p:cNvPr id="6146" name="Picture 2" descr="Image by Author">
+            <a:extLst>
+              <a:ext uri="{FF2B5EF4-FFF2-40B4-BE49-F238E27FC236}">
+                <a16:creationId xmlns:a16="http://schemas.microsoft.com/office/drawing/2014/main" id="{EE687224-B51E-635B-7D1B-8CAEC894C1CB}"/>
+              </a:ext>
+            </a:extLst>
+          </p:cNvPr>
+          <p:cNvPicPr>
+            <a:picLocks noChangeAspect="1" noChangeArrowheads="1"/>
+          </p:cNvPicPr>
+          <p:nvPr/>
+        </p:nvPicPr>
+        <p:blipFill>
+          <a:blip r:embed="rId2">
+            <a:extLst>
+              <a:ext uri="{28A0092B-C50C-407E-A947-70E740481C1C}">
+                <a14:useLocalDpi xmlns:a14="http://schemas.microsoft.com/office/drawing/2010/main" val="0"/>
+              </a:ext>
+            </a:extLst>
+          </a:blip>
+          <a:srcRect/>
+          <a:stretch>
+            <a:fillRect/>
+          </a:stretch>
+        </p:blipFill>
+        <p:spPr bwMode="auto">
+          <a:xfrm>
+            <a:off x="349422" y="1853754"/>
+            <a:ext cx="8280400" cy="4330700"/>
+          </a:xfrm>
+          <a:prstGeom prst="rect">
+            <a:avLst/>
+          </a:prstGeom>
+          <a:noFill/>
+          <a:extLst>
+            <a:ext uri="{909E8E84-426E-40DD-AFC4-6F175D3DCCD1}">
+              <a14:hiddenFill xmlns:a14="http://schemas.microsoft.com/office/drawing/2010/main">
+                <a:solidFill>
+                  <a:srgbClr val="FFFFFF"/>
+                </a:solidFill>
+              </a14:hiddenFill>
+            </a:ext>
+          </a:extLst>
+        </p:spPr>
+      </p:pic>
     </p:spTree>
     <p:extLst>
       <p:ext uri="{BB962C8B-B14F-4D97-AF65-F5344CB8AC3E}">
-        <p14:creationId xmlns:p14="http://schemas.microsoft.com/office/powerpoint/2010/main" val="1975493897"/>
+        <p14:creationId xmlns:p14="http://schemas.microsoft.com/office/powerpoint/2010/main" val="2533776187"/>
       </p:ext>
     </p:extLst>
   </p:cSld>
@@ -3985,7 +4012,7 @@
           <p:cNvPr id="2" name="Title 1">
             <a:extLst>
               <a:ext uri="{FF2B5EF4-FFF2-40B4-BE49-F238E27FC236}">
-                <a16:creationId xmlns:a16="http://schemas.microsoft.com/office/drawing/2014/main" id="{6BF65C20-A3DB-CC86-7479-60674AF383A8}"/>
+                <a16:creationId xmlns:a16="http://schemas.microsoft.com/office/drawing/2014/main" id="{546F845D-D761-C583-138B-B059BBB3A3EF}"/>
               </a:ext>
             </a:extLst>
           </p:cNvPr>
@@ -4003,7 +4030,7 @@
           <a:p>
             <a:r>
               <a:rPr lang="en-US" dirty="0"/>
-              <a:t>Multiple Inputs for X</a:t>
+              <a:t>So, R2…</a:t>
             </a:r>
           </a:p>
         </p:txBody>
@@ -4013,7 +4040,7 @@
           <p:cNvPr id="3" name="Content Placeholder 2">
             <a:extLst>
               <a:ext uri="{FF2B5EF4-FFF2-40B4-BE49-F238E27FC236}">
-                <a16:creationId xmlns:a16="http://schemas.microsoft.com/office/drawing/2014/main" id="{529EEFEB-DF04-7EAE-3754-CD99255770D5}"/>
+                <a16:creationId xmlns:a16="http://schemas.microsoft.com/office/drawing/2014/main" id="{CB202270-26C3-412D-69BD-07D5441FFFF5}"/>
               </a:ext>
             </a:extLst>
           </p:cNvPr>
@@ -4026,78 +4053,147 @@
         </p:nvSpPr>
         <p:spPr>
           <a:xfrm>
-            <a:off x="1451579" y="1853754"/>
-            <a:ext cx="9603275" cy="4199727"/>
-          </a:xfrm>
-        </p:spPr>
-        <p:txBody>
-          <a:bodyPr/>
-          <a:lstStyle/>
-          <a:p>
-            <a:r>
-              <a:rPr lang="en-US" dirty="0"/>
-              <a:t>In most cases, we have several inputs to predict one output. </a:t>
-            </a:r>
-          </a:p>
-          <a:p>
-            <a:pPr lvl="1"/>
-            <a:r>
-              <a:rPr lang="en-US" dirty="0"/>
-              <a:t>E.g. a loan may take in income, age, profession, credit… to predict interest rate. </a:t>
-            </a:r>
-          </a:p>
-          <a:p>
-            <a:pPr lvl="1"/>
-            <a:r>
-              <a:rPr lang="en-US" dirty="0"/>
-              <a:t>Real scenarios can have thousands or millions (image, language, genetics…)</a:t>
-            </a:r>
-          </a:p>
-          <a:p>
-            <a:r>
-              <a:rPr lang="en-US" dirty="0"/>
-              <a:t>The more X inputs we have (assuming relevance), the higher our ceiling is.</a:t>
-            </a:r>
-          </a:p>
-          <a:p>
-            <a:pPr lvl="1"/>
-            <a:r>
-              <a:rPr lang="en-US" dirty="0"/>
-              <a:t>We can capture more of the SST into the model. </a:t>
-            </a:r>
-          </a:p>
-          <a:p>
-            <a:r>
-              <a:rPr lang="en-US" dirty="0"/>
-              <a:t>For us, not all that much changes:</a:t>
-            </a:r>
-          </a:p>
-          <a:p>
-            <a:pPr lvl="1"/>
-            <a:r>
-              <a:rPr lang="en-US" dirty="0"/>
-              <a:t>Data is prepared and shaped the same, X is just wider. </a:t>
-            </a:r>
-          </a:p>
-          <a:p>
-            <a:pPr lvl="1"/>
-            <a:r>
-              <a:rPr lang="en-US" dirty="0"/>
-              <a:t>Sklearn will handle the details for us. </a:t>
-            </a:r>
-          </a:p>
-          <a:p>
-            <a:r>
-              <a:rPr lang="en-US" dirty="0"/>
-              <a:t>We often call the x values features, and the y value the target. </a:t>
-            </a:r>
-          </a:p>
-        </p:txBody>
-      </p:sp>
+            <a:off x="6935234" y="2015732"/>
+            <a:ext cx="5039832" cy="4037749"/>
+          </a:xfrm>
+        </p:spPr>
+        <p:txBody>
+          <a:bodyPr>
+            <a:normAutofit/>
+          </a:bodyPr>
+          <a:lstStyle/>
+          <a:p>
+            <a:r>
+              <a:rPr lang="en-US" dirty="0"/>
+              <a:t>R2 is the percentage of the total variance in Y (SST) that the model explains (SSR). </a:t>
+            </a:r>
+          </a:p>
+          <a:p>
+            <a:pPr lvl="1"/>
+            <a:r>
+              <a:rPr lang="en-US" dirty="0"/>
+              <a:t>I.e. the value of Y varies this much, our model explains this portion, the rest of the variance is stuff that we can’t explain. </a:t>
+            </a:r>
+          </a:p>
+          <a:p>
+            <a:pPr lvl="1"/>
+            <a:r>
+              <a:rPr lang="en-US" dirty="0"/>
+              <a:t>Our model tells us “this percentage” of the departure from the mean. </a:t>
+            </a:r>
+          </a:p>
+          <a:p>
+            <a:r>
+              <a:rPr lang="en-US" dirty="0"/>
+              <a:t>Between 0 and 1. </a:t>
+            </a:r>
+          </a:p>
+          <a:p>
+            <a:r>
+              <a:rPr lang="en-US" dirty="0"/>
+              <a:t>Comparable between scenarios/models. </a:t>
+            </a:r>
+          </a:p>
+        </p:txBody>
+      </p:sp>
+      <p:pic>
+        <p:nvPicPr>
+          <p:cNvPr id="5122" name="Picture 2" descr="Looking at R-Squared. In data science we create regression… | by Erika D | Medium">
+            <a:extLst>
+              <a:ext uri="{FF2B5EF4-FFF2-40B4-BE49-F238E27FC236}">
+                <a16:creationId xmlns:a16="http://schemas.microsoft.com/office/drawing/2014/main" id="{33E561D9-3B7E-D3D7-0E36-949D923B88A1}"/>
+              </a:ext>
+            </a:extLst>
+          </p:cNvPr>
+          <p:cNvPicPr>
+            <a:picLocks noChangeAspect="1" noChangeArrowheads="1"/>
+          </p:cNvPicPr>
+          <p:nvPr/>
+        </p:nvPicPr>
+        <p:blipFill>
+          <a:blip r:embed="rId2">
+            <a:extLst>
+              <a:ext uri="{28A0092B-C50C-407E-A947-70E740481C1C}">
+                <a14:useLocalDpi xmlns:a14="http://schemas.microsoft.com/office/drawing/2010/main" val="0"/>
+              </a:ext>
+            </a:extLst>
+          </a:blip>
+          <a:srcRect/>
+          <a:stretch>
+            <a:fillRect/>
+          </a:stretch>
+        </p:blipFill>
+        <p:spPr bwMode="auto">
+          <a:xfrm>
+            <a:off x="3793524" y="105164"/>
+            <a:ext cx="8299622" cy="1652359"/>
+          </a:xfrm>
+          <a:prstGeom prst="rect">
+            <a:avLst/>
+          </a:prstGeom>
+          <a:noFill/>
+          <a:extLst>
+            <a:ext uri="{909E8E84-426E-40DD-AFC4-6F175D3DCCD1}">
+              <a14:hiddenFill xmlns:a14="http://schemas.microsoft.com/office/drawing/2010/main">
+                <a:solidFill>
+                  <a:srgbClr val="FFFFFF"/>
+                </a:solidFill>
+              </a14:hiddenFill>
+            </a:ext>
+          </a:extLst>
+        </p:spPr>
+      </p:pic>
+      <p:pic>
+        <p:nvPicPr>
+          <p:cNvPr id="5124" name="Picture 4" descr="least squares - Why is $SST=SSE + SSR$? (One variable linear regression) -  Cross Validated">
+            <a:extLst>
+              <a:ext uri="{FF2B5EF4-FFF2-40B4-BE49-F238E27FC236}">
+                <a16:creationId xmlns:a16="http://schemas.microsoft.com/office/drawing/2014/main" id="{066960B9-F325-797F-3765-A430A18CEEF3}"/>
+              </a:ext>
+            </a:extLst>
+          </p:cNvPr>
+          <p:cNvPicPr>
+            <a:picLocks noChangeAspect="1" noChangeArrowheads="1"/>
+          </p:cNvPicPr>
+          <p:nvPr/>
+        </p:nvPicPr>
+        <p:blipFill>
+          <a:blip r:embed="rId3">
+            <a:extLst>
+              <a:ext uri="{28A0092B-C50C-407E-A947-70E740481C1C}">
+                <a14:useLocalDpi xmlns:a14="http://schemas.microsoft.com/office/drawing/2010/main" val="0"/>
+              </a:ext>
+            </a:extLst>
+          </a:blip>
+          <a:srcRect/>
+          <a:stretch>
+            <a:fillRect/>
+          </a:stretch>
+        </p:blipFill>
+        <p:spPr bwMode="auto">
+          <a:xfrm>
+            <a:off x="216934" y="2015732"/>
+            <a:ext cx="6718300" cy="3797300"/>
+          </a:xfrm>
+          <a:prstGeom prst="rect">
+            <a:avLst/>
+          </a:prstGeom>
+          <a:noFill/>
+          <a:extLst>
+            <a:ext uri="{909E8E84-426E-40DD-AFC4-6F175D3DCCD1}">
+              <a14:hiddenFill xmlns:a14="http://schemas.microsoft.com/office/drawing/2010/main">
+                <a:solidFill>
+                  <a:srgbClr val="FFFFFF"/>
+                </a:solidFill>
+              </a14:hiddenFill>
+            </a:ext>
+          </a:extLst>
+        </p:spPr>
+      </p:pic>
     </p:spTree>
     <p:extLst>
       <p:ext uri="{BB962C8B-B14F-4D97-AF65-F5344CB8AC3E}">
-        <p14:creationId xmlns:p14="http://schemas.microsoft.com/office/powerpoint/2010/main" val="562453709"/>
+        <p14:creationId xmlns:p14="http://schemas.microsoft.com/office/powerpoint/2010/main" val="696313299"/>
       </p:ext>
     </p:extLst>
   </p:cSld>
@@ -4129,7 +4225,7 @@
           <p:cNvPr id="2" name="Title 1">
             <a:extLst>
               <a:ext uri="{FF2B5EF4-FFF2-40B4-BE49-F238E27FC236}">
-                <a16:creationId xmlns:a16="http://schemas.microsoft.com/office/drawing/2014/main" id="{EAACAC41-7560-550A-22C7-25D1F869843F}"/>
+                <a16:creationId xmlns:a16="http://schemas.microsoft.com/office/drawing/2014/main" id="{FACEAAE9-B128-E7B4-808A-E3CB8F5777EB}"/>
               </a:ext>
             </a:extLst>
           </p:cNvPr>
@@ -4147,7 +4243,7 @@
           <a:p>
             <a:r>
               <a:rPr lang="en-US" dirty="0"/>
-              <a:t>What’s going on in Multiple Regression?</a:t>
+              <a:t>Using R Squared</a:t>
             </a:r>
           </a:p>
         </p:txBody>
@@ -4157,7 +4253,7 @@
           <p:cNvPr id="3" name="Content Placeholder 2">
             <a:extLst>
               <a:ext uri="{FF2B5EF4-FFF2-40B4-BE49-F238E27FC236}">
-                <a16:creationId xmlns:a16="http://schemas.microsoft.com/office/drawing/2014/main" id="{57AB1097-754F-68CB-361F-23574EA1DCB4}"/>
+                <a16:creationId xmlns:a16="http://schemas.microsoft.com/office/drawing/2014/main" id="{79BCDDF8-807F-28D3-D8C8-F29A4A39CF1A}"/>
               </a:ext>
             </a:extLst>
           </p:cNvPr>
@@ -4170,111 +4266,80 @@
         </p:nvSpPr>
         <p:spPr>
           <a:xfrm>
-            <a:off x="7699975" y="2015732"/>
-            <a:ext cx="4341256" cy="3836773"/>
-          </a:xfrm>
-        </p:spPr>
-        <p:txBody>
-          <a:bodyPr/>
-          <a:lstStyle/>
-          <a:p>
-            <a:r>
-              <a:rPr lang="en-US" dirty="0"/>
-              <a:t>The concepts are identical to 1 X. </a:t>
-            </a:r>
-          </a:p>
-          <a:p>
-            <a:pPr lvl="1"/>
-            <a:r>
-              <a:rPr lang="en-US" dirty="0"/>
-              <a:t>We are still predicting Y. </a:t>
-            </a:r>
-          </a:p>
-          <a:p>
-            <a:pPr lvl="1"/>
-            <a:r>
-              <a:rPr lang="en-US" dirty="0"/>
-              <a:t>The line becomes a plane. </a:t>
-            </a:r>
-          </a:p>
-          <a:p>
-            <a:pPr lvl="1"/>
-            <a:r>
-              <a:rPr lang="en-US" dirty="0"/>
-              <a:t>The equation gains a term. </a:t>
-            </a:r>
-          </a:p>
-          <a:p>
-            <a:r>
-              <a:rPr lang="en-US" dirty="0"/>
-              <a:t>This extends to N dimensions. </a:t>
-            </a:r>
-          </a:p>
-          <a:p>
-            <a:r>
-              <a:rPr lang="en-US" dirty="0"/>
-              <a:t>The higher dimension, the more complex a thing we can predict. </a:t>
-            </a:r>
-          </a:p>
-          <a:p>
-            <a:r>
-              <a:rPr lang="en-US" dirty="0"/>
-              <a:t>We can see why outliers can hurt!</a:t>
-            </a:r>
-          </a:p>
-        </p:txBody>
-      </p:sp>
-      <p:pic>
-        <p:nvPicPr>
-          <p:cNvPr id="7170" name="Picture 2" descr="The regression model in a 3D space. A multi-variable regression model... |  Download Scientific Diagram">
-            <a:extLst>
-              <a:ext uri="{FF2B5EF4-FFF2-40B4-BE49-F238E27FC236}">
-                <a16:creationId xmlns:a16="http://schemas.microsoft.com/office/drawing/2014/main" id="{9402E54C-1A01-3FE9-0EC1-8CCB8291CAB1}"/>
-              </a:ext>
-            </a:extLst>
-          </p:cNvPr>
-          <p:cNvPicPr>
-            <a:picLocks noChangeAspect="1" noChangeArrowheads="1"/>
-          </p:cNvPicPr>
-          <p:nvPr/>
-        </p:nvPicPr>
-        <p:blipFill>
-          <a:blip r:embed="rId2">
-            <a:extLst>
-              <a:ext uri="{28A0092B-C50C-407E-A947-70E740481C1C}">
-                <a14:useLocalDpi xmlns:a14="http://schemas.microsoft.com/office/drawing/2010/main" val="0"/>
-              </a:ext>
-            </a:extLst>
-          </a:blip>
-          <a:srcRect/>
-          <a:stretch>
-            <a:fillRect/>
-          </a:stretch>
-        </p:blipFill>
-        <p:spPr bwMode="auto">
-          <a:xfrm>
-            <a:off x="150769" y="2015732"/>
-            <a:ext cx="7549206" cy="3836773"/>
-          </a:xfrm>
-          <a:prstGeom prst="rect">
-            <a:avLst/>
-          </a:prstGeom>
-          <a:noFill/>
-          <a:extLst>
-            <a:ext uri="{909E8E84-426E-40DD-AFC4-6F175D3DCCD1}">
-              <a14:hiddenFill xmlns:a14="http://schemas.microsoft.com/office/drawing/2010/main">
-                <a:solidFill>
-                  <a:srgbClr val="FFFFFF"/>
-                </a:solidFill>
-              </a14:hiddenFill>
-            </a:ext>
-          </a:extLst>
-        </p:spPr>
-      </p:pic>
+            <a:off x="1451579" y="1977656"/>
+            <a:ext cx="9603275" cy="4075825"/>
+          </a:xfrm>
+        </p:spPr>
+        <p:txBody>
+          <a:bodyPr/>
+          <a:lstStyle/>
+          <a:p>
+            <a:r>
+              <a:rPr lang="en-US" dirty="0"/>
+              <a:t>R2 is the most common default metric to score a model. </a:t>
+            </a:r>
+          </a:p>
+          <a:p>
+            <a:pPr lvl="1"/>
+            <a:r>
+              <a:rPr lang="en-US" dirty="0"/>
+              <a:t>Result of score function in sklearn, default value in </a:t>
+            </a:r>
+            <a:r>
+              <a:rPr lang="en-US" dirty="0" err="1"/>
+              <a:t>statsmodels</a:t>
+            </a:r>
+            <a:r>
+              <a:rPr lang="en-US" dirty="0"/>
+              <a:t>. </a:t>
+            </a:r>
+          </a:p>
+          <a:p>
+            <a:pPr lvl="1"/>
+            <a:r>
+              <a:rPr lang="en-US" dirty="0"/>
+              <a:t>We can compare anything, since it is a percentage. Error measures depend on scale. </a:t>
+            </a:r>
+          </a:p>
+          <a:p>
+            <a:r>
+              <a:rPr lang="en-US" dirty="0"/>
+              <a:t>The (1-R2, SSE) variance is what our model doesn’t capture. </a:t>
+            </a:r>
+          </a:p>
+          <a:p>
+            <a:pPr lvl="1"/>
+            <a:r>
+              <a:rPr lang="en-US" dirty="0"/>
+              <a:t>Variables that we don’t have in the model (e.g. h vs w probably has more factors). </a:t>
+            </a:r>
+          </a:p>
+          <a:p>
+            <a:pPr lvl="1"/>
+            <a:r>
+              <a:rPr lang="en-US" dirty="0"/>
+              <a:t>Some things can’t really be embedded into a model easily as a variable. </a:t>
+            </a:r>
+          </a:p>
+          <a:p>
+            <a:pPr lvl="1"/>
+            <a:r>
+              <a:rPr lang="en-US" dirty="0"/>
+              <a:t>Noise or randomness that we fundamentally can’t predict. </a:t>
+            </a:r>
+          </a:p>
+          <a:p>
+            <a:r>
+              <a:rPr lang="en-US" dirty="0"/>
+              <a:t>Adding more inputs can help us capture more things that determine outcome…</a:t>
+            </a:r>
+          </a:p>
+        </p:txBody>
+      </p:sp>
     </p:spTree>
     <p:extLst>
       <p:ext uri="{BB962C8B-B14F-4D97-AF65-F5344CB8AC3E}">
-        <p14:creationId xmlns:p14="http://schemas.microsoft.com/office/powerpoint/2010/main" val="2542446162"/>
+        <p14:creationId xmlns:p14="http://schemas.microsoft.com/office/powerpoint/2010/main" val="1975493897"/>
       </p:ext>
     </p:extLst>
   </p:cSld>
@@ -4306,7 +4371,7 @@
           <p:cNvPr id="2" name="Title 1">
             <a:extLst>
               <a:ext uri="{FF2B5EF4-FFF2-40B4-BE49-F238E27FC236}">
-                <a16:creationId xmlns:a16="http://schemas.microsoft.com/office/drawing/2014/main" id="{9C40C123-02E6-FE33-9E1E-DF50EB9A49CA}"/>
+                <a16:creationId xmlns:a16="http://schemas.microsoft.com/office/drawing/2014/main" id="{6BF65C20-A3DB-CC86-7479-60674AF383A8}"/>
               </a:ext>
             </a:extLst>
           </p:cNvPr>
@@ -4324,7 +4389,7 @@
           <a:p>
             <a:r>
               <a:rPr lang="en-US" dirty="0"/>
-              <a:t>In practice</a:t>
+              <a:t>Multiple Inputs for X</a:t>
             </a:r>
           </a:p>
         </p:txBody>
@@ -4334,7 +4399,7 @@
           <p:cNvPr id="3" name="Content Placeholder 2">
             <a:extLst>
               <a:ext uri="{FF2B5EF4-FFF2-40B4-BE49-F238E27FC236}">
-                <a16:creationId xmlns:a16="http://schemas.microsoft.com/office/drawing/2014/main" id="{8EABEBED-8085-1448-7245-38595630A521}"/>
+                <a16:creationId xmlns:a16="http://schemas.microsoft.com/office/drawing/2014/main" id="{529EEFEB-DF04-7EAE-3754-CD99255770D5}"/>
               </a:ext>
             </a:extLst>
           </p:cNvPr>
@@ -4347,102 +4412,78 @@
         </p:nvSpPr>
         <p:spPr>
           <a:xfrm>
-            <a:off x="1451579" y="2015732"/>
-            <a:ext cx="5027193" cy="3450613"/>
-          </a:xfrm>
-        </p:spPr>
-        <p:txBody>
-          <a:bodyPr/>
-          <a:lstStyle/>
-          <a:p>
-            <a:r>
-              <a:rPr lang="en-US" dirty="0"/>
-              <a:t>In code very little needs to change. </a:t>
-            </a:r>
-          </a:p>
-          <a:p>
-            <a:pPr lvl="1"/>
-            <a:r>
-              <a:rPr lang="en-US" dirty="0"/>
-              <a:t>If we did it with 1 x, this is just wider. </a:t>
-            </a:r>
-          </a:p>
-          <a:p>
-            <a:r>
-              <a:rPr lang="en-US" dirty="0"/>
-              <a:t>The general process is identical. </a:t>
-            </a:r>
-          </a:p>
-          <a:p>
-            <a:pPr lvl="1"/>
-            <a:r>
-              <a:rPr lang="en-US" dirty="0"/>
-              <a:t>Exact steps that we need to do to process and prepare the data may change. </a:t>
-            </a:r>
-          </a:p>
-          <a:p>
-            <a:pPr lvl="1"/>
-            <a:r>
-              <a:rPr lang="en-US" dirty="0"/>
-              <a:t>Number of features could be ~unlimited. </a:t>
-            </a:r>
-          </a:p>
-          <a:p>
-            <a:endParaRPr lang="en-US" dirty="0"/>
-          </a:p>
-        </p:txBody>
-      </p:sp>
-      <p:pic>
-        <p:nvPicPr>
-          <p:cNvPr id="12290" name="Picture 2" descr="Introducing Scikit-Learn | Python Data Science Handbook">
-            <a:extLst>
-              <a:ext uri="{FF2B5EF4-FFF2-40B4-BE49-F238E27FC236}">
-                <a16:creationId xmlns:a16="http://schemas.microsoft.com/office/drawing/2014/main" id="{526F1CF6-BBBD-CF2A-CADD-6E071E2B9C82}"/>
-              </a:ext>
-            </a:extLst>
-          </p:cNvPr>
-          <p:cNvPicPr>
-            <a:picLocks noChangeAspect="1" noChangeArrowheads="1"/>
-          </p:cNvPicPr>
-          <p:nvPr/>
-        </p:nvPicPr>
-        <p:blipFill>
-          <a:blip r:embed="rId2">
-            <a:extLst>
-              <a:ext uri="{28A0092B-C50C-407E-A947-70E740481C1C}">
-                <a14:useLocalDpi xmlns:a14="http://schemas.microsoft.com/office/drawing/2010/main" val="0"/>
-              </a:ext>
-            </a:extLst>
-          </a:blip>
-          <a:srcRect/>
-          <a:stretch>
-            <a:fillRect/>
-          </a:stretch>
-        </p:blipFill>
-        <p:spPr bwMode="auto">
-          <a:xfrm>
-            <a:off x="6478772" y="2015732"/>
-            <a:ext cx="5486400" cy="3657600"/>
-          </a:xfrm>
-          <a:prstGeom prst="rect">
-            <a:avLst/>
-          </a:prstGeom>
-          <a:noFill/>
-          <a:extLst>
-            <a:ext uri="{909E8E84-426E-40DD-AFC4-6F175D3DCCD1}">
-              <a14:hiddenFill xmlns:a14="http://schemas.microsoft.com/office/drawing/2010/main">
-                <a:solidFill>
-                  <a:srgbClr val="FFFFFF"/>
-                </a:solidFill>
-              </a14:hiddenFill>
-            </a:ext>
-          </a:extLst>
-        </p:spPr>
-      </p:pic>
+            <a:off x="1451579" y="1853754"/>
+            <a:ext cx="9603275" cy="4199727"/>
+          </a:xfrm>
+        </p:spPr>
+        <p:txBody>
+          <a:bodyPr/>
+          <a:lstStyle/>
+          <a:p>
+            <a:r>
+              <a:rPr lang="en-US" dirty="0"/>
+              <a:t>In most cases, we have several inputs to predict one output. </a:t>
+            </a:r>
+          </a:p>
+          <a:p>
+            <a:pPr lvl="1"/>
+            <a:r>
+              <a:rPr lang="en-US" dirty="0"/>
+              <a:t>E.g. a loan may take in income, age, profession, credit… to predict interest rate. </a:t>
+            </a:r>
+          </a:p>
+          <a:p>
+            <a:pPr lvl="1"/>
+            <a:r>
+              <a:rPr lang="en-US" dirty="0"/>
+              <a:t>Real scenarios can have thousands or millions (image, language, genetics…)</a:t>
+            </a:r>
+          </a:p>
+          <a:p>
+            <a:r>
+              <a:rPr lang="en-US" dirty="0"/>
+              <a:t>The more X inputs we have (assuming relevance), the higher our ceiling is.</a:t>
+            </a:r>
+          </a:p>
+          <a:p>
+            <a:pPr lvl="1"/>
+            <a:r>
+              <a:rPr lang="en-US" dirty="0"/>
+              <a:t>We can capture more of the SST into the model. </a:t>
+            </a:r>
+          </a:p>
+          <a:p>
+            <a:r>
+              <a:rPr lang="en-US" dirty="0"/>
+              <a:t>For us, not all that much changes:</a:t>
+            </a:r>
+          </a:p>
+          <a:p>
+            <a:pPr lvl="1"/>
+            <a:r>
+              <a:rPr lang="en-US" dirty="0"/>
+              <a:t>Data is prepared and shaped the same, X is just wider. </a:t>
+            </a:r>
+          </a:p>
+          <a:p>
+            <a:pPr lvl="1"/>
+            <a:r>
+              <a:rPr lang="en-US" dirty="0"/>
+              <a:t>Sklearn will handle the details for us. </a:t>
+            </a:r>
+          </a:p>
+          <a:p>
+            <a:r>
+              <a:rPr lang="en-US" dirty="0"/>
+              <a:t>We often call the x values features, and the y value the target. </a:t>
+            </a:r>
+          </a:p>
+        </p:txBody>
+      </p:sp>
     </p:spTree>
     <p:extLst>
       <p:ext uri="{BB962C8B-B14F-4D97-AF65-F5344CB8AC3E}">
-        <p14:creationId xmlns:p14="http://schemas.microsoft.com/office/powerpoint/2010/main" val="3339658017"/>
+        <p14:creationId xmlns:p14="http://schemas.microsoft.com/office/powerpoint/2010/main" val="562453709"/>
       </p:ext>
     </p:extLst>
   </p:cSld>
@@ -4474,7 +4515,7 @@
           <p:cNvPr id="2" name="Title 1">
             <a:extLst>
               <a:ext uri="{FF2B5EF4-FFF2-40B4-BE49-F238E27FC236}">
-                <a16:creationId xmlns:a16="http://schemas.microsoft.com/office/drawing/2014/main" id="{2C8A9012-918F-588C-D2B8-22CCF082990F}"/>
+                <a16:creationId xmlns:a16="http://schemas.microsoft.com/office/drawing/2014/main" id="{EAACAC41-7560-550A-22C7-25D1F869843F}"/>
               </a:ext>
             </a:extLst>
           </p:cNvPr>
@@ -4492,7 +4533,7 @@
           <a:p>
             <a:r>
               <a:rPr lang="en-US" dirty="0"/>
-              <a:t>The Regression Magic</a:t>
+              <a:t>What’s going on in Multiple Regression?</a:t>
             </a:r>
           </a:p>
         </p:txBody>
@@ -4502,7 +4543,7 @@
           <p:cNvPr id="3" name="Content Placeholder 2">
             <a:extLst>
               <a:ext uri="{FF2B5EF4-FFF2-40B4-BE49-F238E27FC236}">
-                <a16:creationId xmlns:a16="http://schemas.microsoft.com/office/drawing/2014/main" id="{89F7C95A-B432-EB5A-BAB2-9680ACB61B56}"/>
+                <a16:creationId xmlns:a16="http://schemas.microsoft.com/office/drawing/2014/main" id="{57AB1097-754F-68CB-361F-23574EA1DCB4}"/>
               </a:ext>
             </a:extLst>
           </p:cNvPr>
@@ -4515,64 +4556,66 @@
         </p:nvSpPr>
         <p:spPr>
           <a:xfrm>
-            <a:off x="319363" y="1853755"/>
-            <a:ext cx="5933854" cy="4199726"/>
-          </a:xfrm>
-        </p:spPr>
-        <p:txBody>
-          <a:bodyPr/>
-          <a:lstStyle/>
-          <a:p>
-            <a:r>
-              <a:rPr lang="en-US" dirty="0"/>
-              <a:t>These simple linear regression models let us see some of the logic. </a:t>
-            </a:r>
-          </a:p>
-          <a:p>
-            <a:pPr lvl="1"/>
-            <a:r>
-              <a:rPr lang="en-US" dirty="0"/>
-              <a:t>This often isn’t possible with the models we use later. </a:t>
-            </a:r>
-          </a:p>
-          <a:p>
-            <a:r>
-              <a:rPr lang="en-US" dirty="0"/>
-              <a:t>Prediction for Y is just a weighted combination of X. </a:t>
-            </a:r>
-          </a:p>
-          <a:p>
-            <a:pPr lvl="1"/>
-            <a:r>
-              <a:rPr lang="en-US" dirty="0"/>
-              <a:t>The machine learns what those should be. (LLS)</a:t>
-            </a:r>
-          </a:p>
-          <a:p>
-            <a:pPr lvl="1"/>
-            <a:r>
-              <a:rPr lang="en-US" dirty="0"/>
-              <a:t>The combo yields the least SSE possible (best fit). </a:t>
-            </a:r>
-          </a:p>
-          <a:p>
-            <a:r>
-              <a:rPr lang="en-US" dirty="0"/>
-              <a:t>Based on these inputs, what’s the most accurate combination to predict y? </a:t>
-            </a:r>
-          </a:p>
-          <a:p>
-            <a:pPr lvl="1"/>
-            <a:endParaRPr lang="en-US" dirty="0"/>
+            <a:off x="7699975" y="2015732"/>
+            <a:ext cx="4341256" cy="3836773"/>
+          </a:xfrm>
+        </p:spPr>
+        <p:txBody>
+          <a:bodyPr/>
+          <a:lstStyle/>
+          <a:p>
+            <a:r>
+              <a:rPr lang="en-US" dirty="0"/>
+              <a:t>The concepts are identical to 1 X. </a:t>
+            </a:r>
+          </a:p>
+          <a:p>
+            <a:pPr lvl="1"/>
+            <a:r>
+              <a:rPr lang="en-US" dirty="0"/>
+              <a:t>We are still predicting Y. </a:t>
+            </a:r>
+          </a:p>
+          <a:p>
+            <a:pPr lvl="1"/>
+            <a:r>
+              <a:rPr lang="en-US" dirty="0"/>
+              <a:t>The line becomes a plane. </a:t>
+            </a:r>
+          </a:p>
+          <a:p>
+            <a:pPr lvl="1"/>
+            <a:r>
+              <a:rPr lang="en-US" dirty="0"/>
+              <a:t>The equation gains a term. </a:t>
+            </a:r>
+          </a:p>
+          <a:p>
+            <a:r>
+              <a:rPr lang="en-US" dirty="0"/>
+              <a:t>This extends to N dimensions. </a:t>
+            </a:r>
+          </a:p>
+          <a:p>
+            <a:r>
+              <a:rPr lang="en-US" dirty="0"/>
+              <a:t>The higher dimension, the more complex a thing we can predict. </a:t>
+            </a:r>
+          </a:p>
+          <a:p>
+            <a:r>
+              <a:rPr lang="en-US" dirty="0"/>
+              <a:t>We can see why outliers can hurt!</a:t>
+            </a:r>
           </a:p>
         </p:txBody>
       </p:sp>
       <p:pic>
         <p:nvPicPr>
-          <p:cNvPr id="8194" name="Picture 2" descr="Tutorial: Understanding Linear Regression and Regression Error Metrics">
+          <p:cNvPr id="7170" name="Picture 2" descr="The regression model in a 3D space. A multi-variable regression model... |  Download Scientific Diagram">
             <a:extLst>
               <a:ext uri="{FF2B5EF4-FFF2-40B4-BE49-F238E27FC236}">
-                <a16:creationId xmlns:a16="http://schemas.microsoft.com/office/drawing/2014/main" id="{A12E9564-4B9A-C1C1-3B86-0983F4E16BF9}"/>
+                <a16:creationId xmlns:a16="http://schemas.microsoft.com/office/drawing/2014/main" id="{9402E54C-1A01-3FE9-0EC1-8CCB8291CAB1}"/>
               </a:ext>
             </a:extLst>
           </p:cNvPr>
@@ -4596,8 +4639,8 @@
         </p:blipFill>
         <p:spPr bwMode="auto">
           <a:xfrm>
-            <a:off x="6253216" y="2015732"/>
-            <a:ext cx="5933854" cy="3540642"/>
+            <a:off x="150769" y="2015732"/>
+            <a:ext cx="7549206" cy="3836773"/>
           </a:xfrm>
           <a:prstGeom prst="rect">
             <a:avLst/>
@@ -4617,7 +4660,7 @@
     </p:spTree>
     <p:extLst>
       <p:ext uri="{BB962C8B-B14F-4D97-AF65-F5344CB8AC3E}">
-        <p14:creationId xmlns:p14="http://schemas.microsoft.com/office/powerpoint/2010/main" val="1571698123"/>
+        <p14:creationId xmlns:p14="http://schemas.microsoft.com/office/powerpoint/2010/main" val="2542446162"/>
       </p:ext>
     </p:extLst>
   </p:cSld>
@@ -4649,7 +4692,7 @@
           <p:cNvPr id="2" name="Title 1">
             <a:extLst>
               <a:ext uri="{FF2B5EF4-FFF2-40B4-BE49-F238E27FC236}">
-                <a16:creationId xmlns:a16="http://schemas.microsoft.com/office/drawing/2014/main" id="{356F2141-30A2-DEEE-B454-ACA79776DB0E}"/>
+                <a16:creationId xmlns:a16="http://schemas.microsoft.com/office/drawing/2014/main" id="{9C40C123-02E6-FE33-9E1E-DF50EB9A49CA}"/>
               </a:ext>
             </a:extLst>
           </p:cNvPr>
@@ -4667,7 +4710,7 @@
           <a:p>
             <a:r>
               <a:rPr lang="en-US" dirty="0"/>
-              <a:t>Multicollinearity</a:t>
+              <a:t>In practice</a:t>
             </a:r>
           </a:p>
         </p:txBody>
@@ -4677,7 +4720,7 @@
           <p:cNvPr id="3" name="Content Placeholder 2">
             <a:extLst>
               <a:ext uri="{FF2B5EF4-FFF2-40B4-BE49-F238E27FC236}">
-                <a16:creationId xmlns:a16="http://schemas.microsoft.com/office/drawing/2014/main" id="{39D3A950-E4DA-B5FF-F7D1-356F30674396}"/>
+                <a16:creationId xmlns:a16="http://schemas.microsoft.com/office/drawing/2014/main" id="{8EABEBED-8085-1448-7245-38595630A521}"/>
               </a:ext>
             </a:extLst>
           </p:cNvPr>
@@ -4691,51 +4734,101 @@
         <p:spPr>
           <a:xfrm>
             <a:off x="1451579" y="2015732"/>
-            <a:ext cx="9603275" cy="3959766"/>
-          </a:xfrm>
-        </p:spPr>
-        <p:txBody>
-          <a:bodyPr/>
-          <a:lstStyle/>
-          <a:p>
-            <a:r>
-              <a:rPr lang="en-US" dirty="0"/>
-              <a:t>If we have many relevant X inputs, our prediction for Y can be quite accurate. </a:t>
-            </a:r>
-          </a:p>
-          <a:p>
-            <a:pPr lvl="1"/>
-            <a:r>
-              <a:rPr lang="en-US" dirty="0"/>
-              <a:t>Model can take in many relevant factors and weight each appropriately. </a:t>
-            </a:r>
-          </a:p>
-          <a:p>
-            <a:r>
-              <a:rPr lang="en-US" dirty="0"/>
-              <a:t>What if we want to tune our model - make it more accurate or efficient?</a:t>
-            </a:r>
-          </a:p>
-          <a:p>
-            <a:pPr lvl="1"/>
-            <a:r>
-              <a:rPr lang="en-US" dirty="0"/>
-              <a:t>(We’ll do this commonly later for accuracy.) </a:t>
-            </a:r>
-          </a:p>
-          <a:p>
-            <a:pPr lvl="1"/>
-            <a:r>
-              <a:rPr lang="en-US" dirty="0"/>
-              <a:t>We may have many X inputs, but perhaps not all are needed…</a:t>
-            </a:r>
-          </a:p>
-        </p:txBody>
-      </p:sp>
+            <a:ext cx="5027193" cy="3450613"/>
+          </a:xfrm>
+        </p:spPr>
+        <p:txBody>
+          <a:bodyPr/>
+          <a:lstStyle/>
+          <a:p>
+            <a:r>
+              <a:rPr lang="en-US" dirty="0"/>
+              <a:t>In code very little needs to change. </a:t>
+            </a:r>
+          </a:p>
+          <a:p>
+            <a:pPr lvl="1"/>
+            <a:r>
+              <a:rPr lang="en-US" dirty="0"/>
+              <a:t>If we did it with 1 x, this is just wider. </a:t>
+            </a:r>
+          </a:p>
+          <a:p>
+            <a:r>
+              <a:rPr lang="en-US" dirty="0"/>
+              <a:t>The general process is identical. </a:t>
+            </a:r>
+          </a:p>
+          <a:p>
+            <a:pPr lvl="1"/>
+            <a:r>
+              <a:rPr lang="en-US" dirty="0"/>
+              <a:t>Exact steps that we need to do to process and prepare the data may change. </a:t>
+            </a:r>
+          </a:p>
+          <a:p>
+            <a:pPr lvl="1"/>
+            <a:r>
+              <a:rPr lang="en-US" dirty="0"/>
+              <a:t>Number of features could be ~unlimited. </a:t>
+            </a:r>
+          </a:p>
+          <a:p>
+            <a:endParaRPr lang="en-US" dirty="0"/>
+          </a:p>
+        </p:txBody>
+      </p:sp>
+      <p:pic>
+        <p:nvPicPr>
+          <p:cNvPr id="12290" name="Picture 2" descr="Introducing Scikit-Learn | Python Data Science Handbook">
+            <a:extLst>
+              <a:ext uri="{FF2B5EF4-FFF2-40B4-BE49-F238E27FC236}">
+                <a16:creationId xmlns:a16="http://schemas.microsoft.com/office/drawing/2014/main" id="{526F1CF6-BBBD-CF2A-CADD-6E071E2B9C82}"/>
+              </a:ext>
+            </a:extLst>
+          </p:cNvPr>
+          <p:cNvPicPr>
+            <a:picLocks noChangeAspect="1" noChangeArrowheads="1"/>
+          </p:cNvPicPr>
+          <p:nvPr/>
+        </p:nvPicPr>
+        <p:blipFill>
+          <a:blip r:embed="rId2">
+            <a:extLst>
+              <a:ext uri="{28A0092B-C50C-407E-A947-70E740481C1C}">
+                <a14:useLocalDpi xmlns:a14="http://schemas.microsoft.com/office/drawing/2010/main" val="0"/>
+              </a:ext>
+            </a:extLst>
+          </a:blip>
+          <a:srcRect/>
+          <a:stretch>
+            <a:fillRect/>
+          </a:stretch>
+        </p:blipFill>
+        <p:spPr bwMode="auto">
+          <a:xfrm>
+            <a:off x="6478772" y="2015732"/>
+            <a:ext cx="5486400" cy="3657600"/>
+          </a:xfrm>
+          <a:prstGeom prst="rect">
+            <a:avLst/>
+          </a:prstGeom>
+          <a:noFill/>
+          <a:extLst>
+            <a:ext uri="{909E8E84-426E-40DD-AFC4-6F175D3DCCD1}">
+              <a14:hiddenFill xmlns:a14="http://schemas.microsoft.com/office/drawing/2010/main">
+                <a:solidFill>
+                  <a:srgbClr val="FFFFFF"/>
+                </a:solidFill>
+              </a14:hiddenFill>
+            </a:ext>
+          </a:extLst>
+        </p:spPr>
+      </p:pic>
     </p:spTree>
     <p:extLst>
       <p:ext uri="{BB962C8B-B14F-4D97-AF65-F5344CB8AC3E}">
-        <p14:creationId xmlns:p14="http://schemas.microsoft.com/office/powerpoint/2010/main" val="549387644"/>
+        <p14:creationId xmlns:p14="http://schemas.microsoft.com/office/powerpoint/2010/main" val="3339658017"/>
       </p:ext>
     </p:extLst>
   </p:cSld>
@@ -4767,7 +4860,7 @@
           <p:cNvPr id="2" name="Title 1">
             <a:extLst>
               <a:ext uri="{FF2B5EF4-FFF2-40B4-BE49-F238E27FC236}">
-                <a16:creationId xmlns:a16="http://schemas.microsoft.com/office/drawing/2014/main" id="{A00BDED4-C114-4F97-9896-A75AAFF437FD}"/>
+                <a16:creationId xmlns:a16="http://schemas.microsoft.com/office/drawing/2014/main" id="{2C8A9012-918F-588C-D2B8-22CCF082990F}"/>
               </a:ext>
             </a:extLst>
           </p:cNvPr>
@@ -4785,7 +4878,7 @@
           <a:p>
             <a:r>
               <a:rPr lang="en-US" dirty="0"/>
-              <a:t>Example – Medical Screening</a:t>
+              <a:t>The Regression Magic</a:t>
             </a:r>
           </a:p>
         </p:txBody>
@@ -4795,7 +4888,7 @@
           <p:cNvPr id="3" name="Content Placeholder 2">
             <a:extLst>
               <a:ext uri="{FF2B5EF4-FFF2-40B4-BE49-F238E27FC236}">
-                <a16:creationId xmlns:a16="http://schemas.microsoft.com/office/drawing/2014/main" id="{D2717539-74A2-9EE4-4F88-43AAE97788B3}"/>
+                <a16:creationId xmlns:a16="http://schemas.microsoft.com/office/drawing/2014/main" id="{89F7C95A-B432-EB5A-BAB2-9680ACB61B56}"/>
               </a:ext>
             </a:extLst>
           </p:cNvPr>
@@ -4808,79 +4901,109 @@
         </p:nvSpPr>
         <p:spPr>
           <a:xfrm>
-            <a:off x="1451579" y="1853753"/>
-            <a:ext cx="9603275" cy="4199727"/>
-          </a:xfrm>
-        </p:spPr>
-        <p:txBody>
-          <a:bodyPr/>
-          <a:lstStyle/>
-          <a:p>
-            <a:r>
-              <a:rPr lang="en-US" dirty="0"/>
-              <a:t>Suppose we have a model predicting bodyfat percentage for patients. </a:t>
-            </a:r>
-          </a:p>
-          <a:p>
-            <a:pPr lvl="1"/>
-            <a:r>
-              <a:rPr lang="en-US" dirty="0"/>
-              <a:t>Measuring bodyfat is slow and expensive for large numbers of people. </a:t>
-            </a:r>
-          </a:p>
-          <a:p>
-            <a:pPr lvl="1"/>
-            <a:r>
-              <a:rPr lang="en-US" dirty="0"/>
-              <a:t>It can be important for forecasting health outcomes. </a:t>
-            </a:r>
-          </a:p>
-          <a:p>
-            <a:r>
-              <a:rPr lang="en-US" dirty="0"/>
-              <a:t>Several other metrics can tell us about bodyfat percentage, partially. </a:t>
-            </a:r>
-          </a:p>
-          <a:p>
-            <a:pPr lvl="1"/>
-            <a:r>
-              <a:rPr lang="en-US" dirty="0"/>
-              <a:t>Weight, height, waist size, thigh size, calf size, hip size, chest size…</a:t>
-            </a:r>
-          </a:p>
-          <a:p>
-            <a:pPr lvl="1"/>
-            <a:r>
-              <a:rPr lang="en-US" dirty="0"/>
-              <a:t>These are all easier and faster to take and log. </a:t>
-            </a:r>
-          </a:p>
-          <a:p>
-            <a:r>
-              <a:rPr lang="en-US" dirty="0"/>
-              <a:t>Each of these metrics give us some information about bf%. </a:t>
-            </a:r>
-          </a:p>
-          <a:p>
-            <a:pPr lvl="1"/>
-            <a:r>
-              <a:rPr lang="en-US" dirty="0"/>
-              <a:t>There’s a lot of overlap in the information given. </a:t>
-            </a:r>
-          </a:p>
-          <a:p>
-            <a:pPr lvl="1"/>
-            <a:r>
-              <a:rPr lang="en-US" dirty="0"/>
-              <a:t>Waist size, hip size, thigh size aren’t the same, but they tend to tell us almost the same info.</a:t>
-            </a:r>
-          </a:p>
-        </p:txBody>
-      </p:sp>
+            <a:off x="319363" y="1853755"/>
+            <a:ext cx="5933854" cy="4199726"/>
+          </a:xfrm>
+        </p:spPr>
+        <p:txBody>
+          <a:bodyPr/>
+          <a:lstStyle/>
+          <a:p>
+            <a:r>
+              <a:rPr lang="en-US" dirty="0"/>
+              <a:t>These simple linear regression models let us see some of the logic. </a:t>
+            </a:r>
+          </a:p>
+          <a:p>
+            <a:pPr lvl="1"/>
+            <a:r>
+              <a:rPr lang="en-US" dirty="0"/>
+              <a:t>This often isn’t possible with the models we use later. </a:t>
+            </a:r>
+          </a:p>
+          <a:p>
+            <a:r>
+              <a:rPr lang="en-US" dirty="0"/>
+              <a:t>Prediction for Y is just a weighted combination of X. </a:t>
+            </a:r>
+          </a:p>
+          <a:p>
+            <a:pPr lvl="1"/>
+            <a:r>
+              <a:rPr lang="en-US" dirty="0"/>
+              <a:t>The machine learns what those should be. (LLS)</a:t>
+            </a:r>
+          </a:p>
+          <a:p>
+            <a:pPr lvl="1"/>
+            <a:r>
+              <a:rPr lang="en-US" dirty="0"/>
+              <a:t>The combo yields the least SSE possible (best fit). </a:t>
+            </a:r>
+          </a:p>
+          <a:p>
+            <a:r>
+              <a:rPr lang="en-US" dirty="0"/>
+              <a:t>Based on these inputs, what’s the most accurate combination to predict y? </a:t>
+            </a:r>
+          </a:p>
+          <a:p>
+            <a:pPr lvl="1"/>
+            <a:endParaRPr lang="en-US" dirty="0"/>
+          </a:p>
+        </p:txBody>
+      </p:sp>
+      <p:pic>
+        <p:nvPicPr>
+          <p:cNvPr id="8194" name="Picture 2" descr="Tutorial: Understanding Linear Regression and Regression Error Metrics">
+            <a:extLst>
+              <a:ext uri="{FF2B5EF4-FFF2-40B4-BE49-F238E27FC236}">
+                <a16:creationId xmlns:a16="http://schemas.microsoft.com/office/drawing/2014/main" id="{A12E9564-4B9A-C1C1-3B86-0983F4E16BF9}"/>
+              </a:ext>
+            </a:extLst>
+          </p:cNvPr>
+          <p:cNvPicPr>
+            <a:picLocks noChangeAspect="1" noChangeArrowheads="1"/>
+          </p:cNvPicPr>
+          <p:nvPr/>
+        </p:nvPicPr>
+        <p:blipFill>
+          <a:blip r:embed="rId2">
+            <a:extLst>
+              <a:ext uri="{28A0092B-C50C-407E-A947-70E740481C1C}">
+                <a14:useLocalDpi xmlns:a14="http://schemas.microsoft.com/office/drawing/2010/main" val="0"/>
+              </a:ext>
+            </a:extLst>
+          </a:blip>
+          <a:srcRect/>
+          <a:stretch>
+            <a:fillRect/>
+          </a:stretch>
+        </p:blipFill>
+        <p:spPr bwMode="auto">
+          <a:xfrm>
+            <a:off x="6253216" y="2015732"/>
+            <a:ext cx="5933854" cy="3540642"/>
+          </a:xfrm>
+          <a:prstGeom prst="rect">
+            <a:avLst/>
+          </a:prstGeom>
+          <a:noFill/>
+          <a:extLst>
+            <a:ext uri="{909E8E84-426E-40DD-AFC4-6F175D3DCCD1}">
+              <a14:hiddenFill xmlns:a14="http://schemas.microsoft.com/office/drawing/2010/main">
+                <a:solidFill>
+                  <a:srgbClr val="FFFFFF"/>
+                </a:solidFill>
+              </a14:hiddenFill>
+            </a:ext>
+          </a:extLst>
+        </p:spPr>
+      </p:pic>
     </p:spTree>
     <p:extLst>
       <p:ext uri="{BB962C8B-B14F-4D97-AF65-F5344CB8AC3E}">
-        <p14:creationId xmlns:p14="http://schemas.microsoft.com/office/powerpoint/2010/main" val="1427320560"/>
+        <p14:creationId xmlns:p14="http://schemas.microsoft.com/office/powerpoint/2010/main" val="1571698123"/>
       </p:ext>
     </p:extLst>
   </p:cSld>
@@ -4912,7 +5035,7 @@
           <p:cNvPr id="2" name="Title 1">
             <a:extLst>
               <a:ext uri="{FF2B5EF4-FFF2-40B4-BE49-F238E27FC236}">
-                <a16:creationId xmlns:a16="http://schemas.microsoft.com/office/drawing/2014/main" id="{719CCE9F-899C-DC97-92C7-EBA7069C9889}"/>
+                <a16:creationId xmlns:a16="http://schemas.microsoft.com/office/drawing/2014/main" id="{356F2141-30A2-DEEE-B454-ACA79776DB0E}"/>
               </a:ext>
             </a:extLst>
           </p:cNvPr>
@@ -4930,7 +5053,7 @@
           <a:p>
             <a:r>
               <a:rPr lang="en-US" dirty="0"/>
-              <a:t>So, What’s the Problem? </a:t>
+              <a:t>Multicollinearity</a:t>
             </a:r>
           </a:p>
         </p:txBody>
@@ -4940,7 +5063,7 @@
           <p:cNvPr id="3" name="Content Placeholder 2">
             <a:extLst>
               <a:ext uri="{FF2B5EF4-FFF2-40B4-BE49-F238E27FC236}">
-                <a16:creationId xmlns:a16="http://schemas.microsoft.com/office/drawing/2014/main" id="{04BEC346-AE6F-4717-1ED0-F90F8661361B}"/>
+                <a16:creationId xmlns:a16="http://schemas.microsoft.com/office/drawing/2014/main" id="{39D3A950-E4DA-B5FF-F7D1-356F30674396}"/>
               </a:ext>
             </a:extLst>
           </p:cNvPr>
@@ -4954,118 +5077,51 @@
         <p:spPr>
           <a:xfrm>
             <a:off x="1451579" y="2015732"/>
-            <a:ext cx="9603275" cy="4037749"/>
-          </a:xfrm>
-        </p:spPr>
-        <p:txBody>
-          <a:bodyPr/>
-          <a:lstStyle/>
-          <a:p>
-            <a:r>
-              <a:rPr lang="en-US" dirty="0"/>
-              <a:t>If we have X values that are largely the same we call that multicollinearity. </a:t>
-            </a:r>
-          </a:p>
-          <a:p>
-            <a:pPr lvl="1"/>
-            <a:r>
-              <a:rPr lang="en-US" dirty="0"/>
-              <a:t>I.e. several things are highly correlated with each other. </a:t>
-            </a:r>
-          </a:p>
-          <a:p>
-            <a:r>
-              <a:rPr lang="en-US" dirty="0"/>
-              <a:t>This isn’t fatal, but can give us some issues. </a:t>
-            </a:r>
-          </a:p>
-          <a:p>
-            <a:pPr lvl="1"/>
-            <a:r>
-              <a:rPr lang="en-US" dirty="0"/>
-              <a:t>If multiple inputs have the same info, the model can’t figure out how to weight each. </a:t>
-            </a:r>
-          </a:p>
-          <a:p>
-            <a:pPr lvl="1"/>
-            <a:r>
-              <a:rPr lang="en-US" dirty="0"/>
-              <a:t>The assumption is inputs are orthogonal, they have nothing to do with each other. </a:t>
-            </a:r>
-          </a:p>
-          <a:p>
-            <a:pPr lvl="1"/>
-            <a:r>
-              <a:rPr lang="en-US" dirty="0"/>
-              <a:t>A model can’t be sure how to change coefficients as several are almost the same. </a:t>
-            </a:r>
-          </a:p>
-          <a:p>
-            <a:pPr lvl="1"/>
-            <a:r>
-              <a:rPr lang="en-US" dirty="0"/>
-              <a:t>The learning can be hard (not with LLS) and can swing with small changes. </a:t>
-            </a:r>
-          </a:p>
-          <a:p>
-            <a:r>
-              <a:rPr lang="en-US" dirty="0"/>
-              <a:t>Ideally, we want each thing measured exactly once. </a:t>
-            </a:r>
-          </a:p>
-        </p:txBody>
-      </p:sp>
-      <p:pic>
-        <p:nvPicPr>
-          <p:cNvPr id="4" name="Picture 2" descr="The regression model in a 3D space. A multi-variable regression model... |  Download Scientific Diagram">
-            <a:extLst>
-              <a:ext uri="{FF2B5EF4-FFF2-40B4-BE49-F238E27FC236}">
-                <a16:creationId xmlns:a16="http://schemas.microsoft.com/office/drawing/2014/main" id="{F81911F5-536D-B1B7-23C0-DAE0A5792CBF}"/>
-              </a:ext>
-            </a:extLst>
-          </p:cNvPr>
-          <p:cNvPicPr>
-            <a:picLocks noChangeAspect="1" noChangeArrowheads="1"/>
-          </p:cNvPicPr>
-          <p:nvPr/>
-        </p:nvPicPr>
-        <p:blipFill>
-          <a:blip r:embed="rId2">
-            <a:extLst>
-              <a:ext uri="{28A0092B-C50C-407E-A947-70E740481C1C}">
-                <a14:useLocalDpi xmlns:a14="http://schemas.microsoft.com/office/drawing/2010/main" val="0"/>
-              </a:ext>
-            </a:extLst>
-          </a:blip>
-          <a:srcRect/>
-          <a:stretch>
-            <a:fillRect/>
-          </a:stretch>
-        </p:blipFill>
-        <p:spPr bwMode="auto">
-          <a:xfrm>
-            <a:off x="8155459" y="1"/>
-            <a:ext cx="4003590" cy="2034766"/>
-          </a:xfrm>
-          <a:prstGeom prst="rect">
-            <a:avLst/>
-          </a:prstGeom>
-          <a:noFill/>
-          <a:extLst>
-            <a:ext uri="{909E8E84-426E-40DD-AFC4-6F175D3DCCD1}">
-              <a14:hiddenFill xmlns:a14="http://schemas.microsoft.com/office/drawing/2010/main">
-                <a:solidFill>
-                  <a:srgbClr val="FFFFFF"/>
-                </a:solidFill>
-              </a14:hiddenFill>
-            </a:ext>
-          </a:extLst>
-        </p:spPr>
-      </p:pic>
+            <a:ext cx="9603275" cy="3959766"/>
+          </a:xfrm>
+        </p:spPr>
+        <p:txBody>
+          <a:bodyPr/>
+          <a:lstStyle/>
+          <a:p>
+            <a:r>
+              <a:rPr lang="en-US" dirty="0"/>
+              <a:t>If we have many relevant X inputs, our prediction for Y can be quite accurate. </a:t>
+            </a:r>
+          </a:p>
+          <a:p>
+            <a:pPr lvl="1"/>
+            <a:r>
+              <a:rPr lang="en-US" dirty="0"/>
+              <a:t>Model can take in many relevant factors and weight each appropriately. </a:t>
+            </a:r>
+          </a:p>
+          <a:p>
+            <a:r>
+              <a:rPr lang="en-US" dirty="0"/>
+              <a:t>What if we want to tune our model - make it more accurate or efficient?</a:t>
+            </a:r>
+          </a:p>
+          <a:p>
+            <a:pPr lvl="1"/>
+            <a:r>
+              <a:rPr lang="en-US" dirty="0"/>
+              <a:t>(We’ll do this commonly later for accuracy.) </a:t>
+            </a:r>
+          </a:p>
+          <a:p>
+            <a:pPr lvl="1"/>
+            <a:r>
+              <a:rPr lang="en-US" dirty="0"/>
+              <a:t>We may have many X inputs, but perhaps not all are needed…</a:t>
+            </a:r>
+          </a:p>
+        </p:txBody>
+      </p:sp>
     </p:spTree>
     <p:extLst>
       <p:ext uri="{BB962C8B-B14F-4D97-AF65-F5344CB8AC3E}">
-        <p14:creationId xmlns:p14="http://schemas.microsoft.com/office/powerpoint/2010/main" val="808301570"/>
+        <p14:creationId xmlns:p14="http://schemas.microsoft.com/office/powerpoint/2010/main" val="549387644"/>
       </p:ext>
     </p:extLst>
   </p:cSld>
@@ -5097,7 +5153,7 @@
           <p:cNvPr id="2" name="Title 1">
             <a:extLst>
               <a:ext uri="{FF2B5EF4-FFF2-40B4-BE49-F238E27FC236}">
-                <a16:creationId xmlns:a16="http://schemas.microsoft.com/office/drawing/2014/main" id="{52E71A9E-7C47-6840-50F2-A56D39E218E9}"/>
+                <a16:creationId xmlns:a16="http://schemas.microsoft.com/office/drawing/2014/main" id="{A00BDED4-C114-4F97-9896-A75AAFF437FD}"/>
               </a:ext>
             </a:extLst>
           </p:cNvPr>
@@ -5115,7 +5171,7 @@
           <a:p>
             <a:r>
               <a:rPr lang="en-US" dirty="0"/>
-              <a:t>Managing M.C.</a:t>
+              <a:t>Example – Medical Screening</a:t>
             </a:r>
           </a:p>
         </p:txBody>
@@ -5125,7 +5181,7 @@
           <p:cNvPr id="3" name="Content Placeholder 2">
             <a:extLst>
               <a:ext uri="{FF2B5EF4-FFF2-40B4-BE49-F238E27FC236}">
-                <a16:creationId xmlns:a16="http://schemas.microsoft.com/office/drawing/2014/main" id="{C3B4270B-997D-BDDB-0CA6-DA8827327E59}"/>
+                <a16:creationId xmlns:a16="http://schemas.microsoft.com/office/drawing/2014/main" id="{D2717539-74A2-9EE4-4F88-43AAE97788B3}"/>
               </a:ext>
             </a:extLst>
           </p:cNvPr>
@@ -5138,88 +5194,71 @@
         </p:nvSpPr>
         <p:spPr>
           <a:xfrm>
-            <a:off x="1451579" y="1945758"/>
-            <a:ext cx="10254868" cy="4107723"/>
-          </a:xfrm>
-        </p:spPr>
-        <p:txBody>
-          <a:bodyPr>
-            <a:normAutofit/>
-          </a:bodyPr>
-          <a:lstStyle/>
-          <a:p>
-            <a:r>
-              <a:rPr lang="en-US" dirty="0"/>
-              <a:t>Having some </a:t>
-            </a:r>
-            <a:r>
-              <a:rPr lang="en-US" dirty="0" err="1"/>
-              <a:t>m.c.</a:t>
-            </a:r>
-            <a:r>
-              <a:rPr lang="en-US" dirty="0"/>
-              <a:t> won’t break things on its own. </a:t>
-            </a:r>
-          </a:p>
-          <a:p>
-            <a:r>
-              <a:rPr lang="en-US" dirty="0"/>
-              <a:t>In high-dimensional models, training may be slow or not converge. </a:t>
-            </a:r>
-          </a:p>
-          <a:p>
-            <a:r>
-              <a:rPr lang="en-US" dirty="0"/>
-              <a:t>In cases like our linear regression, we can’t know which inputs matter. </a:t>
-            </a:r>
-          </a:p>
-          <a:p>
-            <a:pPr lvl="1"/>
-            <a:r>
-              <a:rPr lang="en-US" dirty="0"/>
-              <a:t>Our first tuning step can be to remove, so model can fit accurately. </a:t>
-            </a:r>
-          </a:p>
-          <a:p>
-            <a:pPr lvl="1"/>
-            <a:r>
-              <a:rPr lang="en-US" dirty="0"/>
-              <a:t>The model is trying to weight importance, if the same thing comes from many sources, that’s hard. </a:t>
-            </a:r>
-          </a:p>
-          <a:p>
-            <a:r>
-              <a:rPr lang="en-US" dirty="0"/>
-              <a:t>Generally, the simpler the model, the better. </a:t>
-            </a:r>
-          </a:p>
-          <a:p>
-            <a:pPr lvl="1"/>
-            <a:r>
-              <a:rPr lang="en-US" dirty="0"/>
-              <a:t>Similar performance with fewer inputs is cheaper. </a:t>
-            </a:r>
-          </a:p>
-          <a:p>
-            <a:pPr lvl="1"/>
-            <a:r>
-              <a:rPr lang="en-US" dirty="0"/>
-              <a:t>In the bf% example, we literally need less work and tools. </a:t>
-            </a:r>
-          </a:p>
-          <a:p>
-            <a:pPr lvl="1"/>
-            <a:r>
-              <a:rPr lang="en-US" dirty="0"/>
-              <a:t>Other whys and </a:t>
-            </a:r>
-            <a:r>
-              <a:rPr lang="en-US" dirty="0" err="1"/>
-              <a:t>hows</a:t>
-            </a:r>
-            <a:r>
-              <a:rPr lang="en-US" dirty="0"/>
-              <a:t> to come later. </a:t>
+            <a:off x="1451579" y="1853753"/>
+            <a:ext cx="9603275" cy="4199727"/>
+          </a:xfrm>
+        </p:spPr>
+        <p:txBody>
+          <a:bodyPr/>
+          <a:lstStyle/>
+          <a:p>
+            <a:r>
+              <a:rPr lang="en-US" dirty="0"/>
+              <a:t>Suppose we have a model predicting bodyfat percentage for patients. </a:t>
+            </a:r>
+          </a:p>
+          <a:p>
+            <a:pPr lvl="1"/>
+            <a:r>
+              <a:rPr lang="en-US" dirty="0"/>
+              <a:t>Measuring bodyfat is slow and expensive for large numbers of people. </a:t>
+            </a:r>
+          </a:p>
+          <a:p>
+            <a:pPr lvl="1"/>
+            <a:r>
+              <a:rPr lang="en-US" dirty="0"/>
+              <a:t>It can be important for forecasting health outcomes. </a:t>
+            </a:r>
+          </a:p>
+          <a:p>
+            <a:r>
+              <a:rPr lang="en-US" dirty="0"/>
+              <a:t>Several other metrics can tell us about bodyfat percentage, partially. </a:t>
+            </a:r>
+          </a:p>
+          <a:p>
+            <a:pPr lvl="1"/>
+            <a:r>
+              <a:rPr lang="en-US" dirty="0"/>
+              <a:t>Weight, height, waist size, thigh size, calf size, hip size, chest size…</a:t>
+            </a:r>
+          </a:p>
+          <a:p>
+            <a:pPr lvl="1"/>
+            <a:r>
+              <a:rPr lang="en-US" dirty="0"/>
+              <a:t>These are all easier and faster to take and log. </a:t>
+            </a:r>
+          </a:p>
+          <a:p>
+            <a:r>
+              <a:rPr lang="en-US" dirty="0"/>
+              <a:t>Each of these metrics give us some information about bf%. </a:t>
+            </a:r>
+          </a:p>
+          <a:p>
+            <a:pPr lvl="1"/>
+            <a:r>
+              <a:rPr lang="en-US" dirty="0"/>
+              <a:t>There’s a lot of overlap in the information given. </a:t>
+            </a:r>
+          </a:p>
+          <a:p>
+            <a:pPr lvl="1"/>
+            <a:r>
+              <a:rPr lang="en-US" dirty="0"/>
+              <a:t>Waist size, hip size, thigh size aren’t the same, but they tend to tell us almost the same info.</a:t>
             </a:r>
           </a:p>
         </p:txBody>
@@ -5227,7 +5266,7 @@
     </p:spTree>
     <p:extLst>
       <p:ext uri="{BB962C8B-B14F-4D97-AF65-F5344CB8AC3E}">
-        <p14:creationId xmlns:p14="http://schemas.microsoft.com/office/powerpoint/2010/main" val="2220712716"/>
+        <p14:creationId xmlns:p14="http://schemas.microsoft.com/office/powerpoint/2010/main" val="1427320560"/>
       </p:ext>
     </p:extLst>
   </p:cSld>
@@ -5259,7 +5298,7 @@
           <p:cNvPr id="2" name="Title 1">
             <a:extLst>
               <a:ext uri="{FF2B5EF4-FFF2-40B4-BE49-F238E27FC236}">
-                <a16:creationId xmlns:a16="http://schemas.microsoft.com/office/drawing/2014/main" id="{D54CD3E1-85EC-DFC3-D236-AE8FBAA7F9F6}"/>
+                <a16:creationId xmlns:a16="http://schemas.microsoft.com/office/drawing/2014/main" id="{719CCE9F-899C-DC97-92C7-EBA7069C9889}"/>
               </a:ext>
             </a:extLst>
           </p:cNvPr>
@@ -5277,13 +5316,8 @@
           <a:p>
             <a:r>
               <a:rPr lang="en-US" dirty="0"/>
-              <a:t>Detecting </a:t>
-            </a:r>
-            <a:r>
-              <a:rPr lang="en-US" dirty="0" err="1"/>
-              <a:t>M.c.</a:t>
-            </a:r>
-            <a:endParaRPr lang="en-US" dirty="0"/>
+              <a:t>So, What’s the Problem? </a:t>
+            </a:r>
           </a:p>
         </p:txBody>
       </p:sp>
@@ -5292,7 +5326,7 @@
           <p:cNvPr id="3" name="Content Placeholder 2">
             <a:extLst>
               <a:ext uri="{FF2B5EF4-FFF2-40B4-BE49-F238E27FC236}">
-                <a16:creationId xmlns:a16="http://schemas.microsoft.com/office/drawing/2014/main" id="{2B8D077B-E87A-1B58-2E36-FE87921AC61D}"/>
+                <a16:creationId xmlns:a16="http://schemas.microsoft.com/office/drawing/2014/main" id="{04BEC346-AE6F-4717-1ED0-F90F8661361B}"/>
               </a:ext>
             </a:extLst>
           </p:cNvPr>
@@ -5305,41 +5339,74 @@
         </p:nvSpPr>
         <p:spPr>
           <a:xfrm>
-            <a:off x="574158" y="2015732"/>
-            <a:ext cx="4742380" cy="3450613"/>
-          </a:xfrm>
-        </p:spPr>
-        <p:txBody>
-          <a:bodyPr/>
-          <a:lstStyle/>
-          <a:p>
-            <a:r>
-              <a:rPr lang="en-US" dirty="0"/>
-              <a:t>We can usually spot it in a </a:t>
-            </a:r>
-            <a:r>
-              <a:rPr lang="en-US" dirty="0" err="1"/>
-              <a:t>pairplot</a:t>
-            </a:r>
-            <a:r>
-              <a:rPr lang="en-US" dirty="0"/>
-              <a:t>. </a:t>
-            </a:r>
-          </a:p>
-          <a:p>
-            <a:r>
-              <a:rPr lang="en-US" dirty="0"/>
-              <a:t>Pairs of variables that appear highly correlated. </a:t>
+            <a:off x="1451579" y="2015732"/>
+            <a:ext cx="9603275" cy="4037749"/>
+          </a:xfrm>
+        </p:spPr>
+        <p:txBody>
+          <a:bodyPr/>
+          <a:lstStyle/>
+          <a:p>
+            <a:r>
+              <a:rPr lang="en-US" dirty="0"/>
+              <a:t>If we have X values that are largely the same we call that multicollinearity. </a:t>
+            </a:r>
+          </a:p>
+          <a:p>
+            <a:pPr lvl="1"/>
+            <a:r>
+              <a:rPr lang="en-US" dirty="0"/>
+              <a:t>I.e. several things are highly correlated with each other. </a:t>
+            </a:r>
+          </a:p>
+          <a:p>
+            <a:r>
+              <a:rPr lang="en-US" dirty="0"/>
+              <a:t>This isn’t fatal, but can give us some issues. </a:t>
+            </a:r>
+          </a:p>
+          <a:p>
+            <a:pPr lvl="1"/>
+            <a:r>
+              <a:rPr lang="en-US" dirty="0"/>
+              <a:t>If multiple inputs have the same info, the model can’t figure out how to weight each. </a:t>
+            </a:r>
+          </a:p>
+          <a:p>
+            <a:pPr lvl="1"/>
+            <a:r>
+              <a:rPr lang="en-US" dirty="0"/>
+              <a:t>The assumption is inputs are orthogonal, they have nothing to do with each other. </a:t>
+            </a:r>
+          </a:p>
+          <a:p>
+            <a:pPr lvl="1"/>
+            <a:r>
+              <a:rPr lang="en-US" dirty="0"/>
+              <a:t>A model can’t be sure how to change coefficients as several are almost the same. </a:t>
+            </a:r>
+          </a:p>
+          <a:p>
+            <a:pPr lvl="1"/>
+            <a:r>
+              <a:rPr lang="en-US" dirty="0"/>
+              <a:t>The learning can be hard (not with LLS) and can swing with small changes. </a:t>
+            </a:r>
+          </a:p>
+          <a:p>
+            <a:r>
+              <a:rPr lang="en-US" dirty="0"/>
+              <a:t>Ideally, we want each thing measured exactly once. </a:t>
             </a:r>
           </a:p>
         </p:txBody>
       </p:sp>
       <p:pic>
         <p:nvPicPr>
-          <p:cNvPr id="10242" name="Picture 2" descr="3 Ways To Detect Multicollinearity &amp; Reasons Why To Expect It | by M.  Hammad Hassan | Medium">
+          <p:cNvPr id="4" name="Picture 2" descr="The regression model in a 3D space. A multi-variable regression model... |  Download Scientific Diagram">
             <a:extLst>
               <a:ext uri="{FF2B5EF4-FFF2-40B4-BE49-F238E27FC236}">
-                <a16:creationId xmlns:a16="http://schemas.microsoft.com/office/drawing/2014/main" id="{5C097F58-9604-5F4C-187F-B53F3D156ED5}"/>
+                <a16:creationId xmlns:a16="http://schemas.microsoft.com/office/drawing/2014/main" id="{F81911F5-536D-B1B7-23C0-DAE0A5792CBF}"/>
               </a:ext>
             </a:extLst>
           </p:cNvPr>
@@ -5363,8 +5430,8 @@
         </p:blipFill>
         <p:spPr bwMode="auto">
           <a:xfrm>
-            <a:off x="5316537" y="0"/>
-            <a:ext cx="6875463" cy="6858000"/>
+            <a:off x="8155459" y="1"/>
+            <a:ext cx="4003590" cy="2034766"/>
           </a:xfrm>
           <a:prstGeom prst="rect">
             <a:avLst/>
@@ -5384,7 +5451,7 @@
     </p:spTree>
     <p:extLst>
       <p:ext uri="{BB962C8B-B14F-4D97-AF65-F5344CB8AC3E}">
-        <p14:creationId xmlns:p14="http://schemas.microsoft.com/office/powerpoint/2010/main" val="2772730483"/>
+        <p14:creationId xmlns:p14="http://schemas.microsoft.com/office/powerpoint/2010/main" val="808301570"/>
       </p:ext>
     </p:extLst>
   </p:cSld>
@@ -5506,7 +5573,7 @@
           <p:cNvPr id="2" name="Title 1">
             <a:extLst>
               <a:ext uri="{FF2B5EF4-FFF2-40B4-BE49-F238E27FC236}">
-                <a16:creationId xmlns:a16="http://schemas.microsoft.com/office/drawing/2014/main" id="{81F9C6C2-A154-8825-FDBB-D88C4FC13FE2}"/>
+                <a16:creationId xmlns:a16="http://schemas.microsoft.com/office/drawing/2014/main" id="{52E71A9E-7C47-6840-50F2-A56D39E218E9}"/>
               </a:ext>
             </a:extLst>
           </p:cNvPr>
@@ -5524,7 +5591,7 @@
           <a:p>
             <a:r>
               <a:rPr lang="en-US" dirty="0"/>
-              <a:t>Measuring M.C. </a:t>
+              <a:t>Managing M.C.</a:t>
             </a:r>
           </a:p>
         </p:txBody>
@@ -5534,7 +5601,7 @@
           <p:cNvPr id="3" name="Content Placeholder 2">
             <a:extLst>
               <a:ext uri="{FF2B5EF4-FFF2-40B4-BE49-F238E27FC236}">
-                <a16:creationId xmlns:a16="http://schemas.microsoft.com/office/drawing/2014/main" id="{1A27369B-0495-86E7-C547-0997A874E96A}"/>
+                <a16:creationId xmlns:a16="http://schemas.microsoft.com/office/drawing/2014/main" id="{C3B4270B-997D-BDDB-0CA6-DA8827327E59}"/>
               </a:ext>
             </a:extLst>
           </p:cNvPr>
@@ -5547,75 +5614,19 @@
         </p:nvSpPr>
         <p:spPr>
           <a:xfrm>
-            <a:off x="1451579" y="2015732"/>
-            <a:ext cx="9603275" cy="4037749"/>
-          </a:xfrm>
-        </p:spPr>
-        <p:txBody>
-          <a:bodyPr/>
-          <a:lstStyle/>
-          <a:p>
-            <a:r>
-              <a:rPr lang="en-US" dirty="0"/>
-              <a:t>We can also calculate a metric called the VIF – variable inflation factor. </a:t>
-            </a:r>
-          </a:p>
-          <a:p>
-            <a:r>
-              <a:rPr lang="en-US" dirty="0"/>
-              <a:t>VIF measures how much of this variable’s info is explained by others. </a:t>
-            </a:r>
-          </a:p>
-          <a:p>
-            <a:pPr lvl="1"/>
-            <a:r>
-              <a:rPr lang="en-US" dirty="0"/>
-              <a:t>We get a value for each input variable. </a:t>
-            </a:r>
-          </a:p>
-          <a:p>
-            <a:pPr lvl="1"/>
-            <a:r>
-              <a:rPr lang="en-US" dirty="0"/>
-              <a:t>1 means there is no multicollinearity. </a:t>
-            </a:r>
-          </a:p>
-          <a:p>
-            <a:pPr lvl="1"/>
-            <a:r>
-              <a:rPr lang="en-US" dirty="0"/>
-              <a:t>Over about 10 are ones that require real investigation. </a:t>
-            </a:r>
-          </a:p>
-          <a:p>
-            <a:r>
-              <a:rPr lang="en-US" dirty="0"/>
-              <a:t>We can remove redundant ones with the help of the p values. </a:t>
-            </a:r>
-          </a:p>
-          <a:p>
-            <a:pPr lvl="1"/>
-            <a:r>
-              <a:rPr lang="en-US" dirty="0" err="1"/>
-              <a:t>Statsmodels</a:t>
-            </a:r>
-            <a:r>
-              <a:rPr lang="en-US" dirty="0"/>
-              <a:t> will give us per variable p-values. </a:t>
-            </a:r>
-          </a:p>
-          <a:p>
-            <a:pPr lvl="1"/>
-            <a:r>
-              <a:rPr lang="en-US" dirty="0"/>
-              <a:t>Roughly a hypothesis test of “is this variable significant”. </a:t>
-            </a:r>
-          </a:p>
-          <a:p>
-            <a:pPr lvl="1"/>
-            <a:r>
-              <a:rPr lang="en-US" dirty="0"/>
-              <a:t>Be aware, there can be odd swings when </a:t>
+            <a:off x="1451579" y="1945758"/>
+            <a:ext cx="10254868" cy="4107723"/>
+          </a:xfrm>
+        </p:spPr>
+        <p:txBody>
+          <a:bodyPr>
+            <a:normAutofit/>
+          </a:bodyPr>
+          <a:lstStyle/>
+          <a:p>
+            <a:r>
+              <a:rPr lang="en-US" dirty="0"/>
+              <a:t>Having some </a:t>
             </a:r>
             <a:r>
               <a:rPr lang="en-US" dirty="0" err="1"/>
@@ -5623,92 +5634,76 @@
             </a:r>
             <a:r>
               <a:rPr lang="en-US" dirty="0"/>
-              <a:t> is there – model can’t weight properly. </a:t>
-            </a:r>
-          </a:p>
-        </p:txBody>
-      </p:sp>
-      <p:pic>
-        <p:nvPicPr>
-          <p:cNvPr id="11266" name="Picture 2" descr="Variance Inflation Factor (VIF). We have always heard about… | by Saurabh  Gupta | Analytics Vidhya | Medium">
-            <a:extLst>
-              <a:ext uri="{FF2B5EF4-FFF2-40B4-BE49-F238E27FC236}">
-                <a16:creationId xmlns:a16="http://schemas.microsoft.com/office/drawing/2014/main" id="{5A08ABD7-9778-8F5C-69F3-0F2BE4220957}"/>
-              </a:ext>
-            </a:extLst>
-          </p:cNvPr>
-          <p:cNvPicPr>
-            <a:picLocks noChangeAspect="1" noChangeArrowheads="1"/>
-          </p:cNvPicPr>
-          <p:nvPr/>
-        </p:nvPicPr>
-        <p:blipFill>
-          <a:blip r:embed="rId2">
-            <a:extLst>
-              <a:ext uri="{28A0092B-C50C-407E-A947-70E740481C1C}">
-                <a14:useLocalDpi xmlns:a14="http://schemas.microsoft.com/office/drawing/2010/main" val="0"/>
-              </a:ext>
-            </a:extLst>
-          </a:blip>
-          <a:srcRect/>
-          <a:stretch>
-            <a:fillRect/>
-          </a:stretch>
-        </p:blipFill>
-        <p:spPr bwMode="auto">
-          <a:xfrm>
-            <a:off x="8591106" y="2961900"/>
-            <a:ext cx="3600893" cy="1870594"/>
-          </a:xfrm>
-          <a:prstGeom prst="rect">
-            <a:avLst/>
-          </a:prstGeom>
-          <a:noFill/>
-          <a:extLst>
-            <a:ext uri="{909E8E84-426E-40DD-AFC4-6F175D3DCCD1}">
-              <a14:hiddenFill xmlns:a14="http://schemas.microsoft.com/office/drawing/2010/main">
-                <a:solidFill>
-                  <a:srgbClr val="FFFFFF"/>
-                </a:solidFill>
-              </a14:hiddenFill>
-            </a:ext>
-          </a:extLst>
-        </p:spPr>
-      </p:pic>
-      <p:pic>
-        <p:nvPicPr>
-          <p:cNvPr id="4" name="Picture 3">
-            <a:extLst>
-              <a:ext uri="{FF2B5EF4-FFF2-40B4-BE49-F238E27FC236}">
-                <a16:creationId xmlns:a16="http://schemas.microsoft.com/office/drawing/2014/main" id="{C5897E0E-5BAD-7D17-1E79-0C36FB87B252}"/>
-              </a:ext>
-            </a:extLst>
-          </p:cNvPr>
-          <p:cNvPicPr>
-            <a:picLocks noChangeAspect="1"/>
-          </p:cNvPicPr>
-          <p:nvPr/>
-        </p:nvPicPr>
-        <p:blipFill>
-          <a:blip r:embed="rId3"/>
-          <a:stretch>
-            <a:fillRect/>
-          </a:stretch>
-        </p:blipFill>
-        <p:spPr>
-          <a:xfrm>
-            <a:off x="6379534" y="-8357"/>
-            <a:ext cx="5812465" cy="2033864"/>
-          </a:xfrm>
-          <a:prstGeom prst="rect">
-            <a:avLst/>
-          </a:prstGeom>
-        </p:spPr>
-      </p:pic>
+              <a:t> won’t break things on its own. </a:t>
+            </a:r>
+          </a:p>
+          <a:p>
+            <a:r>
+              <a:rPr lang="en-US" dirty="0"/>
+              <a:t>In high-dimensional models, training may be slow or not converge. </a:t>
+            </a:r>
+          </a:p>
+          <a:p>
+            <a:r>
+              <a:rPr lang="en-US" dirty="0"/>
+              <a:t>In cases like our linear regression, we can’t know which inputs matter. </a:t>
+            </a:r>
+          </a:p>
+          <a:p>
+            <a:pPr lvl="1"/>
+            <a:r>
+              <a:rPr lang="en-US" dirty="0"/>
+              <a:t>Our first tuning step can be to remove, so model can fit accurately. </a:t>
+            </a:r>
+          </a:p>
+          <a:p>
+            <a:pPr lvl="1"/>
+            <a:r>
+              <a:rPr lang="en-US" dirty="0"/>
+              <a:t>The model is trying to weight importance, if the same thing comes from many sources, that’s hard. </a:t>
+            </a:r>
+          </a:p>
+          <a:p>
+            <a:r>
+              <a:rPr lang="en-US" dirty="0"/>
+              <a:t>Generally, the simpler the model, the better. </a:t>
+            </a:r>
+          </a:p>
+          <a:p>
+            <a:pPr lvl="1"/>
+            <a:r>
+              <a:rPr lang="en-US" dirty="0"/>
+              <a:t>Similar performance with fewer inputs is cheaper. </a:t>
+            </a:r>
+          </a:p>
+          <a:p>
+            <a:pPr lvl="1"/>
+            <a:r>
+              <a:rPr lang="en-US" dirty="0"/>
+              <a:t>In the bf% example, we literally need less work and tools. </a:t>
+            </a:r>
+          </a:p>
+          <a:p>
+            <a:pPr lvl="1"/>
+            <a:r>
+              <a:rPr lang="en-US" dirty="0"/>
+              <a:t>Other whys and </a:t>
+            </a:r>
+            <a:r>
+              <a:rPr lang="en-US" dirty="0" err="1"/>
+              <a:t>hows</a:t>
+            </a:r>
+            <a:r>
+              <a:rPr lang="en-US" dirty="0"/>
+              <a:t> to come later. </a:t>
+            </a:r>
+          </a:p>
+        </p:txBody>
+      </p:sp>
     </p:spTree>
     <p:extLst>
       <p:ext uri="{BB962C8B-B14F-4D97-AF65-F5344CB8AC3E}">
-        <p14:creationId xmlns:p14="http://schemas.microsoft.com/office/powerpoint/2010/main" val="1177527087"/>
+        <p14:creationId xmlns:p14="http://schemas.microsoft.com/office/powerpoint/2010/main" val="2220712716"/>
       </p:ext>
     </p:extLst>
   </p:cSld>
@@ -5740,7 +5735,7 @@
           <p:cNvPr id="2" name="Title 1">
             <a:extLst>
               <a:ext uri="{FF2B5EF4-FFF2-40B4-BE49-F238E27FC236}">
-                <a16:creationId xmlns:a16="http://schemas.microsoft.com/office/drawing/2014/main" id="{DBAB7B93-741F-751B-B5F9-E27762CAD4C7}"/>
+                <a16:creationId xmlns:a16="http://schemas.microsoft.com/office/drawing/2014/main" id="{D54CD3E1-85EC-DFC3-D236-AE8FBAA7F9F6}"/>
               </a:ext>
             </a:extLst>
           </p:cNvPr>
@@ -5758,8 +5753,13 @@
           <a:p>
             <a:r>
               <a:rPr lang="en-US" dirty="0"/>
-              <a:t>Multicollinearity Process</a:t>
-            </a:r>
+              <a:t>Detecting </a:t>
+            </a:r>
+            <a:r>
+              <a:rPr lang="en-US" dirty="0" err="1"/>
+              <a:t>M.c.</a:t>
+            </a:r>
+            <a:endParaRPr lang="en-US" dirty="0"/>
           </a:p>
         </p:txBody>
       </p:sp>
@@ -5768,7 +5768,7 @@
           <p:cNvPr id="3" name="Content Placeholder 2">
             <a:extLst>
               <a:ext uri="{FF2B5EF4-FFF2-40B4-BE49-F238E27FC236}">
-                <a16:creationId xmlns:a16="http://schemas.microsoft.com/office/drawing/2014/main" id="{D5F24B8C-3C93-10B9-E249-DA76197B69D8}"/>
+                <a16:creationId xmlns:a16="http://schemas.microsoft.com/office/drawing/2014/main" id="{2B8D077B-E87A-1B58-2E36-FE87921AC61D}"/>
               </a:ext>
             </a:extLst>
           </p:cNvPr>
@@ -5781,43 +5781,21 @@
         </p:nvSpPr>
         <p:spPr>
           <a:xfrm>
-            <a:off x="1451579" y="2015732"/>
-            <a:ext cx="9603275" cy="4037749"/>
-          </a:xfrm>
-        </p:spPr>
-        <p:txBody>
-          <a:bodyPr/>
-          <a:lstStyle/>
-          <a:p>
-            <a:r>
-              <a:rPr lang="en-US" dirty="0"/>
-              <a:t>We can do an iterative process to deal with </a:t>
+            <a:off x="574158" y="2015732"/>
+            <a:ext cx="4742380" cy="3450613"/>
+          </a:xfrm>
+        </p:spPr>
+        <p:txBody>
+          <a:bodyPr/>
+          <a:lstStyle/>
+          <a:p>
+            <a:r>
+              <a:rPr lang="en-US" dirty="0"/>
+              <a:t>We can usually spot it in a </a:t>
             </a:r>
             <a:r>
               <a:rPr lang="en-US" dirty="0" err="1"/>
-              <a:t>m.c.</a:t>
-            </a:r>
-            <a:r>
-              <a:rPr lang="en-US" dirty="0"/>
-              <a:t>:</a:t>
-            </a:r>
-          </a:p>
-          <a:p>
-            <a:pPr lvl="1"/>
-            <a:r>
-              <a:rPr lang="en-US" dirty="0"/>
-              <a:t>Run the VIF values. </a:t>
-            </a:r>
-          </a:p>
-          <a:p>
-            <a:pPr lvl="1"/>
-            <a:r>
-              <a:rPr lang="en-US" dirty="0"/>
-              <a:t>Run a model via </a:t>
-            </a:r>
-            <a:r>
-              <a:rPr lang="en-US" dirty="0" err="1"/>
-              <a:t>statsmodels</a:t>
+              <a:t>pairplot</a:t>
             </a:r>
             <a:r>
               <a:rPr lang="en-US" dirty="0"/>
@@ -5825,38 +5803,64 @@
             </a:r>
           </a:p>
           <a:p>
-            <a:pPr lvl="1"/>
-            <a:r>
-              <a:rPr lang="en-US" dirty="0"/>
-              <a:t>Remove some variables based on VIF, p-value, and domain knowledge (i.e. which measures actually overlap in real life.)</a:t>
-            </a:r>
-          </a:p>
-          <a:p>
-            <a:pPr lvl="1"/>
-            <a:r>
-              <a:rPr lang="en-US" dirty="0"/>
-              <a:t>Repeat as needed. </a:t>
-            </a:r>
-          </a:p>
-          <a:p>
-            <a:r>
-              <a:rPr lang="en-US" dirty="0"/>
-              <a:t>Tuning a model is largely a judgment call, don’t obsess over where to draw line now. </a:t>
-            </a:r>
-          </a:p>
-          <a:p>
-            <a:pPr lvl="1"/>
-            <a:r>
-              <a:rPr lang="en-US" dirty="0"/>
-              <a:t>No high p-values is a good rule of thumb for now. </a:t>
-            </a:r>
-          </a:p>
-        </p:txBody>
-      </p:sp>
+            <a:r>
+              <a:rPr lang="en-US" dirty="0"/>
+              <a:t>Pairs of variables that appear highly correlated. </a:t>
+            </a:r>
+          </a:p>
+        </p:txBody>
+      </p:sp>
+      <p:pic>
+        <p:nvPicPr>
+          <p:cNvPr id="10242" name="Picture 2" descr="3 Ways To Detect Multicollinearity &amp; Reasons Why To Expect It | by M.  Hammad Hassan | Medium">
+            <a:extLst>
+              <a:ext uri="{FF2B5EF4-FFF2-40B4-BE49-F238E27FC236}">
+                <a16:creationId xmlns:a16="http://schemas.microsoft.com/office/drawing/2014/main" id="{5C097F58-9604-5F4C-187F-B53F3D156ED5}"/>
+              </a:ext>
+            </a:extLst>
+          </p:cNvPr>
+          <p:cNvPicPr>
+            <a:picLocks noChangeAspect="1" noChangeArrowheads="1"/>
+          </p:cNvPicPr>
+          <p:nvPr/>
+        </p:nvPicPr>
+        <p:blipFill>
+          <a:blip r:embed="rId2">
+            <a:extLst>
+              <a:ext uri="{28A0092B-C50C-407E-A947-70E740481C1C}">
+                <a14:useLocalDpi xmlns:a14="http://schemas.microsoft.com/office/drawing/2010/main" val="0"/>
+              </a:ext>
+            </a:extLst>
+          </a:blip>
+          <a:srcRect/>
+          <a:stretch>
+            <a:fillRect/>
+          </a:stretch>
+        </p:blipFill>
+        <p:spPr bwMode="auto">
+          <a:xfrm>
+            <a:off x="5316537" y="0"/>
+            <a:ext cx="6875463" cy="6858000"/>
+          </a:xfrm>
+          <a:prstGeom prst="rect">
+            <a:avLst/>
+          </a:prstGeom>
+          <a:noFill/>
+          <a:extLst>
+            <a:ext uri="{909E8E84-426E-40DD-AFC4-6F175D3DCCD1}">
+              <a14:hiddenFill xmlns:a14="http://schemas.microsoft.com/office/drawing/2010/main">
+                <a:solidFill>
+                  <a:srgbClr val="FFFFFF"/>
+                </a:solidFill>
+              </a14:hiddenFill>
+            </a:ext>
+          </a:extLst>
+        </p:spPr>
+      </p:pic>
     </p:spTree>
     <p:extLst>
       <p:ext uri="{BB962C8B-B14F-4D97-AF65-F5344CB8AC3E}">
-        <p14:creationId xmlns:p14="http://schemas.microsoft.com/office/powerpoint/2010/main" val="3320482818"/>
+        <p14:creationId xmlns:p14="http://schemas.microsoft.com/office/powerpoint/2010/main" val="2772730483"/>
       </p:ext>
     </p:extLst>
   </p:cSld>
@@ -5888,7 +5892,7 @@
           <p:cNvPr id="2" name="Title 1">
             <a:extLst>
               <a:ext uri="{FF2B5EF4-FFF2-40B4-BE49-F238E27FC236}">
-                <a16:creationId xmlns:a16="http://schemas.microsoft.com/office/drawing/2014/main" id="{F00579DB-FA27-0B61-6BD7-E48DD2765F59}"/>
+                <a16:creationId xmlns:a16="http://schemas.microsoft.com/office/drawing/2014/main" id="{81F9C6C2-A154-8825-FDBB-D88C4FC13FE2}"/>
               </a:ext>
             </a:extLst>
           </p:cNvPr>
@@ -5906,7 +5910,7 @@
           <a:p>
             <a:r>
               <a:rPr lang="en-US" dirty="0"/>
-              <a:t>R2 and Multiple Regression</a:t>
+              <a:t>Measuring M.C. </a:t>
             </a:r>
           </a:p>
         </p:txBody>
@@ -5916,7 +5920,7 @@
           <p:cNvPr id="3" name="Content Placeholder 2">
             <a:extLst>
               <a:ext uri="{FF2B5EF4-FFF2-40B4-BE49-F238E27FC236}">
-                <a16:creationId xmlns:a16="http://schemas.microsoft.com/office/drawing/2014/main" id="{7D80E5D9-4ECB-3A34-3356-7F1C8EA976A8}"/>
+                <a16:creationId xmlns:a16="http://schemas.microsoft.com/office/drawing/2014/main" id="{1A27369B-0495-86E7-C547-0997A874E96A}"/>
               </a:ext>
             </a:extLst>
           </p:cNvPr>
@@ -5939,49 +5943,158 @@
           <a:p>
             <a:r>
               <a:rPr lang="en-US" dirty="0"/>
-              <a:t>We can measure the ‘completeness’ of our model with R2. </a:t>
-            </a:r>
-          </a:p>
-          <a:p>
-            <a:pPr lvl="1"/>
-            <a:r>
-              <a:rPr lang="en-US" dirty="0"/>
-              <a:t>How much of the variance of Y do we capture, and how much do we miss? </a:t>
-            </a:r>
-          </a:p>
-          <a:p>
-            <a:pPr lvl="1"/>
-            <a:r>
-              <a:rPr lang="en-US" dirty="0"/>
-              <a:t>Default score is easy to use and compare to others. </a:t>
-            </a:r>
-          </a:p>
-          <a:p>
-            <a:r>
-              <a:rPr lang="en-US" dirty="0"/>
-              <a:t>We can build a more complete model by adding inputs to X. </a:t>
-            </a:r>
-          </a:p>
-          <a:p>
-            <a:pPr lvl="1"/>
-            <a:r>
-              <a:rPr lang="en-US" dirty="0"/>
-              <a:t>Most things are determined by many factors. </a:t>
-            </a:r>
-          </a:p>
-          <a:p>
-            <a:pPr lvl="1"/>
-            <a:r>
-              <a:rPr lang="en-US" dirty="0"/>
-              <a:t>Little changes, other than it becomes harder to visualize and do by hand. </a:t>
-            </a:r>
-          </a:p>
-        </p:txBody>
-      </p:sp>
+              <a:t>We can also calculate a metric called the VIF – variable inflation factor. </a:t>
+            </a:r>
+          </a:p>
+          <a:p>
+            <a:r>
+              <a:rPr lang="en-US" dirty="0"/>
+              <a:t>VIF measures how much of this variable’s info is explained by others. </a:t>
+            </a:r>
+          </a:p>
+          <a:p>
+            <a:pPr lvl="1"/>
+            <a:r>
+              <a:rPr lang="en-US" dirty="0"/>
+              <a:t>We get a value for each input variable. </a:t>
+            </a:r>
+          </a:p>
+          <a:p>
+            <a:pPr lvl="1"/>
+            <a:r>
+              <a:rPr lang="en-US" dirty="0"/>
+              <a:t>1 means there is no multicollinearity. </a:t>
+            </a:r>
+          </a:p>
+          <a:p>
+            <a:pPr lvl="1"/>
+            <a:r>
+              <a:rPr lang="en-US" dirty="0"/>
+              <a:t>Over about 10 are ones that require real investigation. </a:t>
+            </a:r>
+          </a:p>
+          <a:p>
+            <a:r>
+              <a:rPr lang="en-US" dirty="0"/>
+              <a:t>We can remove redundant ones with the help of the p values. </a:t>
+            </a:r>
+          </a:p>
+          <a:p>
+            <a:pPr lvl="1"/>
+            <a:r>
+              <a:rPr lang="en-US" dirty="0" err="1"/>
+              <a:t>Statsmodels</a:t>
+            </a:r>
+            <a:r>
+              <a:rPr lang="en-US" dirty="0"/>
+              <a:t> will give us per variable p-values. </a:t>
+            </a:r>
+          </a:p>
+          <a:p>
+            <a:pPr lvl="1"/>
+            <a:r>
+              <a:rPr lang="en-US" dirty="0"/>
+              <a:t>Roughly a hypothesis test of “is this variable significant”. </a:t>
+            </a:r>
+          </a:p>
+          <a:p>
+            <a:pPr lvl="1"/>
+            <a:r>
+              <a:rPr lang="en-US" dirty="0"/>
+              <a:t>Be aware, there can be odd swings when </a:t>
+            </a:r>
+            <a:r>
+              <a:rPr lang="en-US" dirty="0" err="1"/>
+              <a:t>m.c.</a:t>
+            </a:r>
+            <a:r>
+              <a:rPr lang="en-US" dirty="0"/>
+              <a:t> is there – model can’t weight properly. </a:t>
+            </a:r>
+          </a:p>
+        </p:txBody>
+      </p:sp>
+      <p:pic>
+        <p:nvPicPr>
+          <p:cNvPr id="11266" name="Picture 2" descr="Variance Inflation Factor (VIF). We have always heard about… | by Saurabh  Gupta | Analytics Vidhya | Medium">
+            <a:extLst>
+              <a:ext uri="{FF2B5EF4-FFF2-40B4-BE49-F238E27FC236}">
+                <a16:creationId xmlns:a16="http://schemas.microsoft.com/office/drawing/2014/main" id="{5A08ABD7-9778-8F5C-69F3-0F2BE4220957}"/>
+              </a:ext>
+            </a:extLst>
+          </p:cNvPr>
+          <p:cNvPicPr>
+            <a:picLocks noChangeAspect="1" noChangeArrowheads="1"/>
+          </p:cNvPicPr>
+          <p:nvPr/>
+        </p:nvPicPr>
+        <p:blipFill>
+          <a:blip r:embed="rId2">
+            <a:extLst>
+              <a:ext uri="{28A0092B-C50C-407E-A947-70E740481C1C}">
+                <a14:useLocalDpi xmlns:a14="http://schemas.microsoft.com/office/drawing/2010/main" val="0"/>
+              </a:ext>
+            </a:extLst>
+          </a:blip>
+          <a:srcRect/>
+          <a:stretch>
+            <a:fillRect/>
+          </a:stretch>
+        </p:blipFill>
+        <p:spPr bwMode="auto">
+          <a:xfrm>
+            <a:off x="8591106" y="2961900"/>
+            <a:ext cx="3600893" cy="1870594"/>
+          </a:xfrm>
+          <a:prstGeom prst="rect">
+            <a:avLst/>
+          </a:prstGeom>
+          <a:noFill/>
+          <a:extLst>
+            <a:ext uri="{909E8E84-426E-40DD-AFC4-6F175D3DCCD1}">
+              <a14:hiddenFill xmlns:a14="http://schemas.microsoft.com/office/drawing/2010/main">
+                <a:solidFill>
+                  <a:srgbClr val="FFFFFF"/>
+                </a:solidFill>
+              </a14:hiddenFill>
+            </a:ext>
+          </a:extLst>
+        </p:spPr>
+      </p:pic>
+      <p:pic>
+        <p:nvPicPr>
+          <p:cNvPr id="4" name="Picture 3">
+            <a:extLst>
+              <a:ext uri="{FF2B5EF4-FFF2-40B4-BE49-F238E27FC236}">
+                <a16:creationId xmlns:a16="http://schemas.microsoft.com/office/drawing/2014/main" id="{C5897E0E-5BAD-7D17-1E79-0C36FB87B252}"/>
+              </a:ext>
+            </a:extLst>
+          </p:cNvPr>
+          <p:cNvPicPr>
+            <a:picLocks noChangeAspect="1"/>
+          </p:cNvPicPr>
+          <p:nvPr/>
+        </p:nvPicPr>
+        <p:blipFill>
+          <a:blip r:embed="rId3"/>
+          <a:stretch>
+            <a:fillRect/>
+          </a:stretch>
+        </p:blipFill>
+        <p:spPr>
+          <a:xfrm>
+            <a:off x="6379534" y="-8357"/>
+            <a:ext cx="5812465" cy="2033864"/>
+          </a:xfrm>
+          <a:prstGeom prst="rect">
+            <a:avLst/>
+          </a:prstGeom>
+        </p:spPr>
+      </p:pic>
     </p:spTree>
     <p:extLst>
       <p:ext uri="{BB962C8B-B14F-4D97-AF65-F5344CB8AC3E}">
-        <p14:creationId xmlns:p14="http://schemas.microsoft.com/office/powerpoint/2010/main" val="2254303245"/>
+        <p14:creationId xmlns:p14="http://schemas.microsoft.com/office/powerpoint/2010/main" val="1177527087"/>
       </p:ext>
     </p:extLst>
   </p:cSld>
@@ -6013,7 +6126,7 @@
           <p:cNvPr id="2" name="Title 1">
             <a:extLst>
               <a:ext uri="{FF2B5EF4-FFF2-40B4-BE49-F238E27FC236}">
-                <a16:creationId xmlns:a16="http://schemas.microsoft.com/office/drawing/2014/main" id="{87976A0E-3B86-BD5A-B164-A9353F4D9A40}"/>
+                <a16:creationId xmlns:a16="http://schemas.microsoft.com/office/drawing/2014/main" id="{DBAB7B93-741F-751B-B5F9-E27762CAD4C7}"/>
               </a:ext>
             </a:extLst>
           </p:cNvPr>
@@ -6031,7 +6144,7 @@
           <a:p>
             <a:r>
               <a:rPr lang="en-US" dirty="0"/>
-              <a:t>Applying the Stats Stuff</a:t>
+              <a:t>Multicollinearity Process</a:t>
             </a:r>
           </a:p>
         </p:txBody>
@@ -6041,7 +6154,7 @@
           <p:cNvPr id="3" name="Content Placeholder 2">
             <a:extLst>
               <a:ext uri="{FF2B5EF4-FFF2-40B4-BE49-F238E27FC236}">
-                <a16:creationId xmlns:a16="http://schemas.microsoft.com/office/drawing/2014/main" id="{C88534AB-87B6-8BCB-5980-B03E4DBA1ED0}"/>
+                <a16:creationId xmlns:a16="http://schemas.microsoft.com/office/drawing/2014/main" id="{D5F24B8C-3C93-10B9-E249-DA76197B69D8}"/>
               </a:ext>
             </a:extLst>
           </p:cNvPr>
@@ -6054,78 +6167,74 @@
         </p:nvSpPr>
         <p:spPr>
           <a:xfrm>
-            <a:off x="1137147" y="1853754"/>
-            <a:ext cx="10229058" cy="4199727"/>
-          </a:xfrm>
-        </p:spPr>
-        <p:txBody>
-          <a:bodyPr/>
-          <a:lstStyle/>
-          <a:p>
-            <a:r>
-              <a:rPr lang="en-US" dirty="0"/>
-              <a:t>The first way that we’ll directly use the stats in ML is EDA – exploratory data analysis. </a:t>
-            </a:r>
-          </a:p>
-          <a:p>
-            <a:r>
-              <a:rPr lang="en-US" dirty="0"/>
-              <a:t>This is both art and science, there isn’t a specific set of steps. </a:t>
-            </a:r>
-          </a:p>
-          <a:p>
-            <a:r>
-              <a:rPr lang="en-US" dirty="0"/>
-              <a:t>We do EDA up front to basically look for stuff in our data that may matter. </a:t>
-            </a:r>
-          </a:p>
-          <a:p>
-            <a:pPr lvl="1"/>
-            <a:r>
-              <a:rPr lang="en-US" dirty="0"/>
-              <a:t>Missing values. </a:t>
-            </a:r>
-          </a:p>
-          <a:p>
-            <a:pPr lvl="1"/>
-            <a:r>
-              <a:rPr lang="en-US" dirty="0"/>
-              <a:t>Outliers. </a:t>
-            </a:r>
-          </a:p>
-          <a:p>
-            <a:pPr lvl="1"/>
-            <a:r>
-              <a:rPr lang="en-US" dirty="0"/>
-              <a:t>Errors. </a:t>
-            </a:r>
-          </a:p>
-          <a:p>
-            <a:pPr lvl="1"/>
-            <a:r>
-              <a:rPr lang="en-US" dirty="0"/>
-              <a:t>Patterns in data – numeric that is categorical, odd distributions, correlation, </a:t>
+            <a:off x="1451579" y="2015732"/>
+            <a:ext cx="9603275" cy="4037749"/>
+          </a:xfrm>
+        </p:spPr>
+        <p:txBody>
+          <a:bodyPr/>
+          <a:lstStyle/>
+          <a:p>
+            <a:r>
+              <a:rPr lang="en-US" dirty="0"/>
+              <a:t>We can do an iterative process to deal with </a:t>
             </a:r>
             <a:r>
               <a:rPr lang="en-US" dirty="0" err="1"/>
-              <a:t>etc</a:t>
-            </a:r>
-            <a:r>
-              <a:rPr lang="en-US" dirty="0"/>
-              <a:t>…</a:t>
-            </a:r>
-          </a:p>
-          <a:p>
-            <a:pPr lvl="1"/>
-            <a:r>
-              <a:rPr lang="en-US" dirty="0"/>
-              <a:t>Things that don’t vary. </a:t>
-            </a:r>
-          </a:p>
-          <a:p>
-            <a:r>
-              <a:rPr lang="en-US" dirty="0"/>
-              <a:t>Exactly what we are looking for varies, generally anything that may impact model accuracy. </a:t>
+              <a:t>m.c.</a:t>
+            </a:r>
+            <a:r>
+              <a:rPr lang="en-US" dirty="0"/>
+              <a:t>:</a:t>
+            </a:r>
+          </a:p>
+          <a:p>
+            <a:pPr lvl="1"/>
+            <a:r>
+              <a:rPr lang="en-US" dirty="0"/>
+              <a:t>Run the VIF values. </a:t>
+            </a:r>
+          </a:p>
+          <a:p>
+            <a:pPr lvl="1"/>
+            <a:r>
+              <a:rPr lang="en-US" dirty="0"/>
+              <a:t>Run a model via </a:t>
+            </a:r>
+            <a:r>
+              <a:rPr lang="en-US" dirty="0" err="1"/>
+              <a:t>statsmodels</a:t>
+            </a:r>
+            <a:r>
+              <a:rPr lang="en-US" dirty="0"/>
+              <a:t>. </a:t>
+            </a:r>
+          </a:p>
+          <a:p>
+            <a:pPr lvl="1"/>
+            <a:r>
+              <a:rPr lang="en-US" dirty="0"/>
+              <a:t>Remove some variables based on VIF, p-value, and domain knowledge (i.e. which measures actually overlap in real life.)</a:t>
+            </a:r>
+          </a:p>
+          <a:p>
+            <a:pPr lvl="1"/>
+            <a:r>
+              <a:rPr lang="en-US" dirty="0"/>
+              <a:t>Repeat as needed. </a:t>
+            </a:r>
+          </a:p>
+          <a:p>
+            <a:r>
+              <a:rPr lang="en-US" dirty="0"/>
+              <a:t>Tuning a model is largely a judgment call, don’t obsess over where to draw line now. </a:t>
+            </a:r>
+          </a:p>
+          <a:p>
+            <a:pPr lvl="1"/>
+            <a:r>
+              <a:rPr lang="en-US" dirty="0"/>
+              <a:t>No high p-values is a good rule of thumb for now. </a:t>
             </a:r>
           </a:p>
         </p:txBody>
@@ -6133,7 +6242,7 @@
     </p:spTree>
     <p:extLst>
       <p:ext uri="{BB962C8B-B14F-4D97-AF65-F5344CB8AC3E}">
-        <p14:creationId xmlns:p14="http://schemas.microsoft.com/office/powerpoint/2010/main" val="681943827"/>
+        <p14:creationId xmlns:p14="http://schemas.microsoft.com/office/powerpoint/2010/main" val="3320482818"/>
       </p:ext>
     </p:extLst>
   </p:cSld>
@@ -6165,7 +6274,7 @@
           <p:cNvPr id="2" name="Title 1">
             <a:extLst>
               <a:ext uri="{FF2B5EF4-FFF2-40B4-BE49-F238E27FC236}">
-                <a16:creationId xmlns:a16="http://schemas.microsoft.com/office/drawing/2014/main" id="{4A4C0882-D407-8B64-8F0A-A2FCB1DD5132}"/>
+                <a16:creationId xmlns:a16="http://schemas.microsoft.com/office/drawing/2014/main" id="{F00579DB-FA27-0B61-6BD7-E48DD2765F59}"/>
               </a:ext>
             </a:extLst>
           </p:cNvPr>
@@ -6183,7 +6292,7 @@
           <a:p>
             <a:r>
               <a:rPr lang="en-US" dirty="0"/>
-              <a:t>EDA Process</a:t>
+              <a:t>R2 and Multiple Regression</a:t>
             </a:r>
           </a:p>
         </p:txBody>
@@ -6193,7 +6302,7 @@
           <p:cNvPr id="3" name="Content Placeholder 2">
             <a:extLst>
               <a:ext uri="{FF2B5EF4-FFF2-40B4-BE49-F238E27FC236}">
-                <a16:creationId xmlns:a16="http://schemas.microsoft.com/office/drawing/2014/main" id="{780F816F-240E-8E75-9E3E-BE8153876DC1}"/>
+                <a16:creationId xmlns:a16="http://schemas.microsoft.com/office/drawing/2014/main" id="{7D80E5D9-4ECB-3A34-3356-7F1C8EA976A8}"/>
               </a:ext>
             </a:extLst>
           </p:cNvPr>
@@ -6206,61 +6315,51 @@
         </p:nvSpPr>
         <p:spPr>
           <a:xfrm>
-            <a:off x="1451579" y="1935126"/>
-            <a:ext cx="9603275" cy="4118355"/>
-          </a:xfrm>
-        </p:spPr>
-        <p:txBody>
-          <a:bodyPr/>
-          <a:lstStyle/>
-          <a:p>
-            <a:r>
-              <a:rPr lang="en-US" dirty="0"/>
-              <a:t>Doing EDA is something that will feel more natural with time. </a:t>
-            </a:r>
-          </a:p>
-          <a:p>
-            <a:r>
-              <a:rPr lang="en-US" dirty="0"/>
-              <a:t>We generally want to look graphically and arithmetically. </a:t>
-            </a:r>
-          </a:p>
-          <a:p>
-            <a:pPr lvl="1"/>
-            <a:r>
-              <a:rPr lang="en-US" dirty="0"/>
-              <a:t>Info, describe, and head/sample can give us a look at the stats. </a:t>
-            </a:r>
-          </a:p>
-          <a:p>
-            <a:pPr lvl="1"/>
-            <a:r>
-              <a:rPr lang="en-US" dirty="0" err="1"/>
-              <a:t>Pairplot</a:t>
-            </a:r>
-            <a:r>
-              <a:rPr lang="en-US" dirty="0"/>
-              <a:t>, box plot, count plot can give us a visual look. </a:t>
-            </a:r>
-          </a:p>
-          <a:p>
-            <a:r>
-              <a:rPr lang="en-US" dirty="0"/>
-              <a:t>Usually need to do some iteration. </a:t>
-            </a:r>
-          </a:p>
-          <a:p>
-            <a:pPr lvl="1"/>
-            <a:r>
-              <a:rPr lang="en-US" dirty="0"/>
-              <a:t>Clean something you notice, e.g. outliers. </a:t>
-            </a:r>
-          </a:p>
-          <a:p>
-            <a:pPr lvl="1"/>
-            <a:r>
-              <a:rPr lang="en-US" dirty="0"/>
-              <a:t>Check again to see how the data looks. </a:t>
+            <a:off x="1451579" y="2015732"/>
+            <a:ext cx="9603275" cy="4037749"/>
+          </a:xfrm>
+        </p:spPr>
+        <p:txBody>
+          <a:bodyPr/>
+          <a:lstStyle/>
+          <a:p>
+            <a:r>
+              <a:rPr lang="en-US" dirty="0"/>
+              <a:t>We can measure the ‘completeness’ of our model with R2. </a:t>
+            </a:r>
+          </a:p>
+          <a:p>
+            <a:pPr lvl="1"/>
+            <a:r>
+              <a:rPr lang="en-US" dirty="0"/>
+              <a:t>How much of the variance of Y do we capture, and how much do we miss? </a:t>
+            </a:r>
+          </a:p>
+          <a:p>
+            <a:pPr lvl="1"/>
+            <a:r>
+              <a:rPr lang="en-US" dirty="0"/>
+              <a:t>Default score is easy to use and compare to others. </a:t>
+            </a:r>
+          </a:p>
+          <a:p>
+            <a:r>
+              <a:rPr lang="en-US" dirty="0"/>
+              <a:t>We can build a more complete model by adding inputs to X. </a:t>
+            </a:r>
+          </a:p>
+          <a:p>
+            <a:pPr lvl="1"/>
+            <a:r>
+              <a:rPr lang="en-US" dirty="0"/>
+              <a:t>Most things are determined by many factors. </a:t>
+            </a:r>
+          </a:p>
+          <a:p>
+            <a:pPr lvl="1"/>
+            <a:r>
+              <a:rPr lang="en-US" dirty="0"/>
+              <a:t>Little changes, other than it becomes harder to visualize and do by hand. </a:t>
             </a:r>
           </a:p>
         </p:txBody>
@@ -6268,7 +6367,7 @@
     </p:spTree>
     <p:extLst>
       <p:ext uri="{BB962C8B-B14F-4D97-AF65-F5344CB8AC3E}">
-        <p14:creationId xmlns:p14="http://schemas.microsoft.com/office/powerpoint/2010/main" val="3257656829"/>
+        <p14:creationId xmlns:p14="http://schemas.microsoft.com/office/powerpoint/2010/main" val="2254303245"/>
       </p:ext>
     </p:extLst>
   </p:cSld>
@@ -6300,7 +6399,7 @@
           <p:cNvPr id="2" name="Title 1">
             <a:extLst>
               <a:ext uri="{FF2B5EF4-FFF2-40B4-BE49-F238E27FC236}">
-                <a16:creationId xmlns:a16="http://schemas.microsoft.com/office/drawing/2014/main" id="{D5817EF8-E39C-2C99-C847-C9C851B0D810}"/>
+                <a16:creationId xmlns:a16="http://schemas.microsoft.com/office/drawing/2014/main" id="{87976A0E-3B86-BD5A-B164-A9353F4D9A40}"/>
               </a:ext>
             </a:extLst>
           </p:cNvPr>
@@ -6318,7 +6417,7 @@
           <a:p>
             <a:r>
               <a:rPr lang="en-US" dirty="0"/>
-              <a:t>Example – Nothing of interest</a:t>
+              <a:t>Applying the Stats Stuff</a:t>
             </a:r>
           </a:p>
         </p:txBody>
@@ -6328,7 +6427,7 @@
           <p:cNvPr id="3" name="Content Placeholder 2">
             <a:extLst>
               <a:ext uri="{FF2B5EF4-FFF2-40B4-BE49-F238E27FC236}">
-                <a16:creationId xmlns:a16="http://schemas.microsoft.com/office/drawing/2014/main" id="{0007CA20-2F49-6A82-8DAB-B37C4A40A4D8}"/>
+                <a16:creationId xmlns:a16="http://schemas.microsoft.com/office/drawing/2014/main" id="{C88534AB-87B6-8BCB-5980-B03E4DBA1ED0}"/>
               </a:ext>
             </a:extLst>
           </p:cNvPr>
@@ -6341,99 +6440,86 @@
         </p:nvSpPr>
         <p:spPr>
           <a:xfrm>
-            <a:off x="423001" y="2015732"/>
-            <a:ext cx="5830216" cy="3450613"/>
-          </a:xfrm>
-        </p:spPr>
-        <p:txBody>
-          <a:bodyPr/>
-          <a:lstStyle/>
-          <a:p>
-            <a:r>
-              <a:rPr lang="en-US" dirty="0"/>
-              <a:t>This is some data with nothing obvious to address.</a:t>
-            </a:r>
-          </a:p>
-          <a:p>
-            <a:pPr lvl="1"/>
-            <a:r>
-              <a:rPr lang="en-US" dirty="0"/>
-              <a:t>No odd patterns. </a:t>
-            </a:r>
-          </a:p>
-          <a:p>
-            <a:pPr lvl="1"/>
-            <a:r>
-              <a:rPr lang="en-US" dirty="0"/>
-              <a:t>No clear outliers.  </a:t>
-            </a:r>
-          </a:p>
-          <a:p>
-            <a:pPr lvl="1"/>
-            <a:r>
-              <a:rPr lang="en-US" dirty="0"/>
-              <a:t>Variables seem to have a ‘normal’ amount of variance. </a:t>
-            </a:r>
-          </a:p>
-          <a:p>
-            <a:r>
-              <a:rPr lang="en-US" dirty="0"/>
-              <a:t>This data is ready to be used by a model. </a:t>
-            </a:r>
-          </a:p>
-        </p:txBody>
-      </p:sp>
-      <p:pic>
-        <p:nvPicPr>
-          <p:cNvPr id="2050" name="Picture 2" descr="Dramatically Improve Your Exploratory Data Analysis (EDA) | Towards Data  Science">
-            <a:extLst>
-              <a:ext uri="{FF2B5EF4-FFF2-40B4-BE49-F238E27FC236}">
-                <a16:creationId xmlns:a16="http://schemas.microsoft.com/office/drawing/2014/main" id="{62C6B302-3011-29D1-D3F3-EDB4D3F80499}"/>
-              </a:ext>
-            </a:extLst>
-          </p:cNvPr>
-          <p:cNvPicPr>
-            <a:picLocks noChangeAspect="1" noChangeArrowheads="1"/>
-          </p:cNvPicPr>
-          <p:nvPr/>
-        </p:nvPicPr>
-        <p:blipFill>
-          <a:blip r:embed="rId2">
-            <a:extLst>
-              <a:ext uri="{28A0092B-C50C-407E-A947-70E740481C1C}">
-                <a14:useLocalDpi xmlns:a14="http://schemas.microsoft.com/office/drawing/2010/main" val="0"/>
-              </a:ext>
-            </a:extLst>
-          </a:blip>
-          <a:srcRect/>
-          <a:stretch>
-            <a:fillRect/>
-          </a:stretch>
-        </p:blipFill>
-        <p:spPr bwMode="auto">
-          <a:xfrm>
-            <a:off x="6253216" y="1532238"/>
-            <a:ext cx="5830217" cy="4707924"/>
-          </a:xfrm>
-          <a:prstGeom prst="rect">
-            <a:avLst/>
-          </a:prstGeom>
-          <a:noFill/>
-          <a:extLst>
-            <a:ext uri="{909E8E84-426E-40DD-AFC4-6F175D3DCCD1}">
-              <a14:hiddenFill xmlns:a14="http://schemas.microsoft.com/office/drawing/2010/main">
-                <a:solidFill>
-                  <a:srgbClr val="FFFFFF"/>
-                </a:solidFill>
-              </a14:hiddenFill>
-            </a:ext>
-          </a:extLst>
-        </p:spPr>
-      </p:pic>
+            <a:off x="1137147" y="1853754"/>
+            <a:ext cx="10229058" cy="4199727"/>
+          </a:xfrm>
+        </p:spPr>
+        <p:txBody>
+          <a:bodyPr/>
+          <a:lstStyle/>
+          <a:p>
+            <a:r>
+              <a:rPr lang="en-US" dirty="0"/>
+              <a:t>The first way that we’ll directly use the stats in ML is EDA – exploratory data analysis. </a:t>
+            </a:r>
+          </a:p>
+          <a:p>
+            <a:r>
+              <a:rPr lang="en-US" dirty="0"/>
+              <a:t>This is both art and science, there isn’t a specific set of steps. </a:t>
+            </a:r>
+          </a:p>
+          <a:p>
+            <a:r>
+              <a:rPr lang="en-US" dirty="0"/>
+              <a:t>We do EDA up front to basically look for stuff in our data that may matter. </a:t>
+            </a:r>
+          </a:p>
+          <a:p>
+            <a:pPr lvl="1"/>
+            <a:r>
+              <a:rPr lang="en-US" dirty="0"/>
+              <a:t>Missing values. </a:t>
+            </a:r>
+          </a:p>
+          <a:p>
+            <a:pPr lvl="1"/>
+            <a:r>
+              <a:rPr lang="en-US" dirty="0"/>
+              <a:t>Outliers. </a:t>
+            </a:r>
+          </a:p>
+          <a:p>
+            <a:pPr lvl="1"/>
+            <a:r>
+              <a:rPr lang="en-US" dirty="0"/>
+              <a:t>Errors. </a:t>
+            </a:r>
+          </a:p>
+          <a:p>
+            <a:pPr lvl="1"/>
+            <a:r>
+              <a:rPr lang="en-US" dirty="0"/>
+              <a:t>Patterns in data – numeric that is categorical, odd distributions, correlation, </a:t>
+            </a:r>
+            <a:r>
+              <a:rPr lang="en-US" dirty="0" err="1"/>
+              <a:t>etc</a:t>
+            </a:r>
+            <a:r>
+              <a:rPr lang="en-US" dirty="0"/>
+              <a:t>…</a:t>
+            </a:r>
+          </a:p>
+          <a:p>
+            <a:pPr lvl="1"/>
+            <a:r>
+              <a:rPr lang="en-US" dirty="0"/>
+              <a:t>Things that don’t vary. </a:t>
+            </a:r>
+          </a:p>
+          <a:p>
+            <a:r>
+              <a:rPr lang="en-US" dirty="0"/>
+              <a:t>Exactly what we are looking for varies, generally anything that may impact model accuracy. </a:t>
+            </a:r>
+          </a:p>
+        </p:txBody>
+      </p:sp>
     </p:spTree>
     <p:extLst>
       <p:ext uri="{BB962C8B-B14F-4D97-AF65-F5344CB8AC3E}">
-        <p14:creationId xmlns:p14="http://schemas.microsoft.com/office/powerpoint/2010/main" val="4244201324"/>
+        <p14:creationId xmlns:p14="http://schemas.microsoft.com/office/powerpoint/2010/main" val="681943827"/>
       </p:ext>
     </p:extLst>
   </p:cSld>
@@ -6465,7 +6551,7 @@
           <p:cNvPr id="2" name="Title 1">
             <a:extLst>
               <a:ext uri="{FF2B5EF4-FFF2-40B4-BE49-F238E27FC236}">
-                <a16:creationId xmlns:a16="http://schemas.microsoft.com/office/drawing/2014/main" id="{F646F2B0-E9E8-6ECD-010A-951DCE13AF15}"/>
+                <a16:creationId xmlns:a16="http://schemas.microsoft.com/office/drawing/2014/main" id="{4A4C0882-D407-8B64-8F0A-A2FCB1DD5132}"/>
               </a:ext>
             </a:extLst>
           </p:cNvPr>
@@ -6483,7 +6569,7 @@
           <a:p>
             <a:r>
               <a:rPr lang="en-US" dirty="0"/>
-              <a:t>Something Weird!</a:t>
+              <a:t>EDA Process</a:t>
             </a:r>
           </a:p>
         </p:txBody>
@@ -6493,7 +6579,7 @@
           <p:cNvPr id="3" name="Content Placeholder 2">
             <a:extLst>
               <a:ext uri="{FF2B5EF4-FFF2-40B4-BE49-F238E27FC236}">
-                <a16:creationId xmlns:a16="http://schemas.microsoft.com/office/drawing/2014/main" id="{E3E974AF-233E-0DB4-053E-917DB605B8F3}"/>
+                <a16:creationId xmlns:a16="http://schemas.microsoft.com/office/drawing/2014/main" id="{780F816F-240E-8E75-9E3E-BE8153876DC1}"/>
               </a:ext>
             </a:extLst>
           </p:cNvPr>
@@ -6506,92 +6592,69 @@
         </p:nvSpPr>
         <p:spPr>
           <a:xfrm>
-            <a:off x="8669278" y="2015732"/>
-            <a:ext cx="3522721" cy="4119254"/>
-          </a:xfrm>
-        </p:spPr>
-        <p:txBody>
-          <a:bodyPr/>
-          <a:lstStyle/>
-          <a:p>
-            <a:r>
-              <a:rPr lang="en-US" dirty="0"/>
-              <a:t>This dataset shows a clear separation of one class from the other two. </a:t>
-            </a:r>
-          </a:p>
-          <a:p>
-            <a:r>
-              <a:rPr lang="en-US" dirty="0"/>
-              <a:t>This may guide us…</a:t>
-            </a:r>
-          </a:p>
-          <a:p>
-            <a:pPr lvl="1"/>
-            <a:r>
-              <a:rPr lang="en-US" dirty="0"/>
-              <a:t>If we want to classify, that division helps. </a:t>
-            </a:r>
-          </a:p>
-          <a:p>
-            <a:pPr lvl="1"/>
-            <a:r>
-              <a:rPr lang="en-US" dirty="0"/>
-              <a:t>If that value is a feature, maybe it is better categorical. (??)</a:t>
-            </a:r>
-          </a:p>
-        </p:txBody>
-      </p:sp>
-      <p:pic>
-        <p:nvPicPr>
-          <p:cNvPr id="1026" name="Picture 2" descr="Fundamentals of Exploratory Data Analysis with Python Implementation">
-            <a:extLst>
-              <a:ext uri="{FF2B5EF4-FFF2-40B4-BE49-F238E27FC236}">
-                <a16:creationId xmlns:a16="http://schemas.microsoft.com/office/drawing/2014/main" id="{BC0AE3D8-EB56-C1D7-273C-DF74389A7933}"/>
-              </a:ext>
-            </a:extLst>
-          </p:cNvPr>
-          <p:cNvPicPr>
-            <a:picLocks noChangeAspect="1" noChangeArrowheads="1"/>
-          </p:cNvPicPr>
-          <p:nvPr/>
-        </p:nvPicPr>
-        <p:blipFill>
-          <a:blip r:embed="rId2">
-            <a:extLst>
-              <a:ext uri="{28A0092B-C50C-407E-A947-70E740481C1C}">
-                <a14:useLocalDpi xmlns:a14="http://schemas.microsoft.com/office/drawing/2010/main" val="0"/>
-              </a:ext>
-            </a:extLst>
-          </a:blip>
-          <a:srcRect/>
-          <a:stretch>
-            <a:fillRect/>
-          </a:stretch>
-        </p:blipFill>
-        <p:spPr bwMode="auto">
-          <a:xfrm>
-            <a:off x="180753" y="1853754"/>
-            <a:ext cx="8488526" cy="4203368"/>
-          </a:xfrm>
-          <a:prstGeom prst="rect">
-            <a:avLst/>
-          </a:prstGeom>
-          <a:noFill/>
-          <a:extLst>
-            <a:ext uri="{909E8E84-426E-40DD-AFC4-6F175D3DCCD1}">
-              <a14:hiddenFill xmlns:a14="http://schemas.microsoft.com/office/drawing/2010/main">
-                <a:solidFill>
-                  <a:srgbClr val="FFFFFF"/>
-                </a:solidFill>
-              </a14:hiddenFill>
-            </a:ext>
-          </a:extLst>
-        </p:spPr>
-      </p:pic>
+            <a:off x="1451579" y="1935126"/>
+            <a:ext cx="9603275" cy="4118355"/>
+          </a:xfrm>
+        </p:spPr>
+        <p:txBody>
+          <a:bodyPr/>
+          <a:lstStyle/>
+          <a:p>
+            <a:r>
+              <a:rPr lang="en-US" dirty="0"/>
+              <a:t>Doing EDA is something that will feel more natural with time. </a:t>
+            </a:r>
+          </a:p>
+          <a:p>
+            <a:r>
+              <a:rPr lang="en-US" dirty="0"/>
+              <a:t>We generally want to look graphically and arithmetically. </a:t>
+            </a:r>
+          </a:p>
+          <a:p>
+            <a:pPr lvl="1"/>
+            <a:r>
+              <a:rPr lang="en-US" dirty="0"/>
+              <a:t>Info, describe, and head/sample can give us a look at the stats. </a:t>
+            </a:r>
+          </a:p>
+          <a:p>
+            <a:pPr lvl="1"/>
+            <a:r>
+              <a:rPr lang="en-US" dirty="0" err="1"/>
+              <a:t>Pairplot</a:t>
+            </a:r>
+            <a:r>
+              <a:rPr lang="en-US" dirty="0"/>
+              <a:t>, box plot, count plot can give us a visual look. </a:t>
+            </a:r>
+          </a:p>
+          <a:p>
+            <a:r>
+              <a:rPr lang="en-US" dirty="0"/>
+              <a:t>Usually need to do some iteration. </a:t>
+            </a:r>
+          </a:p>
+          <a:p>
+            <a:pPr lvl="1"/>
+            <a:r>
+              <a:rPr lang="en-US" dirty="0"/>
+              <a:t>Clean something you notice, e.g. outliers. </a:t>
+            </a:r>
+          </a:p>
+          <a:p>
+            <a:pPr lvl="1"/>
+            <a:r>
+              <a:rPr lang="en-US" dirty="0"/>
+              <a:t>Check again to see how the data looks. </a:t>
+            </a:r>
+          </a:p>
+        </p:txBody>
+      </p:sp>
     </p:spTree>
     <p:extLst>
       <p:ext uri="{BB962C8B-B14F-4D97-AF65-F5344CB8AC3E}">
-        <p14:creationId xmlns:p14="http://schemas.microsoft.com/office/powerpoint/2010/main" val="1405714686"/>
+        <p14:creationId xmlns:p14="http://schemas.microsoft.com/office/powerpoint/2010/main" val="3257656829"/>
       </p:ext>
     </p:extLst>
   </p:cSld>
@@ -6623,7 +6686,7 @@
           <p:cNvPr id="2" name="Title 1">
             <a:extLst>
               <a:ext uri="{FF2B5EF4-FFF2-40B4-BE49-F238E27FC236}">
-                <a16:creationId xmlns:a16="http://schemas.microsoft.com/office/drawing/2014/main" id="{43CC361B-31A2-BBC7-8128-D8B8C25AD75B}"/>
+                <a16:creationId xmlns:a16="http://schemas.microsoft.com/office/drawing/2014/main" id="{D5817EF8-E39C-2C99-C847-C9C851B0D810}"/>
               </a:ext>
             </a:extLst>
           </p:cNvPr>
@@ -6634,74 +6697,84 @@
             <p:ph type="title"/>
           </p:nvPr>
         </p:nvSpPr>
+        <p:spPr/>
+        <p:txBody>
+          <a:bodyPr/>
+          <a:lstStyle/>
+          <a:p>
+            <a:r>
+              <a:rPr lang="en-US" dirty="0"/>
+              <a:t>Example – Nothing of interest</a:t>
+            </a:r>
+          </a:p>
+        </p:txBody>
+      </p:sp>
+      <p:sp>
+        <p:nvSpPr>
+          <p:cNvPr id="3" name="Content Placeholder 2">
+            <a:extLst>
+              <a:ext uri="{FF2B5EF4-FFF2-40B4-BE49-F238E27FC236}">
+                <a16:creationId xmlns:a16="http://schemas.microsoft.com/office/drawing/2014/main" id="{0007CA20-2F49-6A82-8DAB-B37C4A40A4D8}"/>
+              </a:ext>
+            </a:extLst>
+          </p:cNvPr>
+          <p:cNvSpPr>
+            <a:spLocks noGrp="1"/>
+          </p:cNvSpPr>
+          <p:nvPr>
+            <p:ph idx="1"/>
+          </p:nvPr>
+        </p:nvSpPr>
         <p:spPr>
           <a:xfrm>
-            <a:off x="1451580" y="804519"/>
-            <a:ext cx="3468084" cy="1049235"/>
-          </a:xfrm>
-        </p:spPr>
-        <p:txBody>
-          <a:bodyPr/>
-          <a:lstStyle/>
-          <a:p>
-            <a:r>
-              <a:rPr lang="en-US" dirty="0"/>
-              <a:t>Outliers and Categorical</a:t>
-            </a:r>
-          </a:p>
-        </p:txBody>
-      </p:sp>
-      <p:sp>
-        <p:nvSpPr>
-          <p:cNvPr id="3" name="Content Placeholder 2">
-            <a:extLst>
-              <a:ext uri="{FF2B5EF4-FFF2-40B4-BE49-F238E27FC236}">
-                <a16:creationId xmlns:a16="http://schemas.microsoft.com/office/drawing/2014/main" id="{6500D048-50A6-B407-5D37-96849F79C2CF}"/>
-              </a:ext>
-            </a:extLst>
-          </p:cNvPr>
-          <p:cNvSpPr>
-            <a:spLocks noGrp="1"/>
-          </p:cNvSpPr>
-          <p:nvPr>
-            <p:ph idx="1"/>
-          </p:nvPr>
-        </p:nvSpPr>
-        <p:spPr>
-          <a:xfrm>
-            <a:off x="1" y="2015732"/>
-            <a:ext cx="4805916" cy="3906603"/>
-          </a:xfrm>
-        </p:spPr>
-        <p:txBody>
-          <a:bodyPr/>
-          <a:lstStyle/>
-          <a:p>
-            <a:r>
-              <a:rPr lang="en-US" dirty="0"/>
-              <a:t>This data appears to have outliers. </a:t>
-            </a:r>
-          </a:p>
-          <a:p>
-            <a:r>
-              <a:rPr lang="en-US" dirty="0"/>
-              <a:t>The last column appears to be better as categorical. </a:t>
-            </a:r>
-          </a:p>
-          <a:p>
-            <a:r>
-              <a:rPr lang="en-US" dirty="0"/>
-              <a:t>The ‘hour’ column has a weird distribution – depending on what I am doing, this might matter. </a:t>
+            <a:off x="423001" y="2015732"/>
+            <a:ext cx="5830216" cy="3450613"/>
+          </a:xfrm>
+        </p:spPr>
+        <p:txBody>
+          <a:bodyPr/>
+          <a:lstStyle/>
+          <a:p>
+            <a:r>
+              <a:rPr lang="en-US" dirty="0"/>
+              <a:t>This is some data with nothing obvious to address.</a:t>
+            </a:r>
+          </a:p>
+          <a:p>
+            <a:pPr lvl="1"/>
+            <a:r>
+              <a:rPr lang="en-US" dirty="0"/>
+              <a:t>No odd patterns. </a:t>
+            </a:r>
+          </a:p>
+          <a:p>
+            <a:pPr lvl="1"/>
+            <a:r>
+              <a:rPr lang="en-US" dirty="0"/>
+              <a:t>No clear outliers.  </a:t>
+            </a:r>
+          </a:p>
+          <a:p>
+            <a:pPr lvl="1"/>
+            <a:r>
+              <a:rPr lang="en-US" dirty="0"/>
+              <a:t>Variables seem to have a ‘normal’ amount of variance. </a:t>
+            </a:r>
+          </a:p>
+          <a:p>
+            <a:r>
+              <a:rPr lang="en-US" dirty="0"/>
+              <a:t>This data is ready to be used by a model. </a:t>
             </a:r>
           </a:p>
         </p:txBody>
       </p:sp>
       <p:pic>
         <p:nvPicPr>
-          <p:cNvPr id="3078" name="Picture 6" descr="distributions - How to interpret pairplots() - Cross Validated">
+          <p:cNvPr id="2050" name="Picture 2" descr="Dramatically Improve Your Exploratory Data Analysis (EDA) | Towards Data  Science">
             <a:extLst>
               <a:ext uri="{FF2B5EF4-FFF2-40B4-BE49-F238E27FC236}">
-                <a16:creationId xmlns:a16="http://schemas.microsoft.com/office/drawing/2014/main" id="{03CF9A95-830B-82D9-D993-2BEF2843CF4D}"/>
+                <a16:creationId xmlns:a16="http://schemas.microsoft.com/office/drawing/2014/main" id="{62C6B302-3011-29D1-D3F3-EDB4D3F80499}"/>
               </a:ext>
             </a:extLst>
           </p:cNvPr>
@@ -6725,8 +6798,8 @@
         </p:blipFill>
         <p:spPr bwMode="auto">
           <a:xfrm>
-            <a:off x="4919663" y="0"/>
-            <a:ext cx="7272337" cy="6858000"/>
+            <a:off x="6253216" y="1532238"/>
+            <a:ext cx="5830217" cy="4707924"/>
           </a:xfrm>
           <a:prstGeom prst="rect">
             <a:avLst/>
@@ -6746,7 +6819,7 @@
     </p:spTree>
     <p:extLst>
       <p:ext uri="{BB962C8B-B14F-4D97-AF65-F5344CB8AC3E}">
-        <p14:creationId xmlns:p14="http://schemas.microsoft.com/office/powerpoint/2010/main" val="4043875854"/>
+        <p14:creationId xmlns:p14="http://schemas.microsoft.com/office/powerpoint/2010/main" val="4244201324"/>
       </p:ext>
     </p:extLst>
   </p:cSld>
@@ -6778,7 +6851,7 @@
           <p:cNvPr id="2" name="Title 1">
             <a:extLst>
               <a:ext uri="{FF2B5EF4-FFF2-40B4-BE49-F238E27FC236}">
-                <a16:creationId xmlns:a16="http://schemas.microsoft.com/office/drawing/2014/main" id="{A0A2B0D2-0D58-554E-D694-76BAC3DD2921}"/>
+                <a16:creationId xmlns:a16="http://schemas.microsoft.com/office/drawing/2014/main" id="{F646F2B0-E9E8-6ECD-010A-951DCE13AF15}"/>
               </a:ext>
             </a:extLst>
           </p:cNvPr>
@@ -6796,13 +6869,8 @@
           <a:p>
             <a:r>
               <a:rPr lang="en-US" dirty="0"/>
-              <a:t>Get EDA-</a:t>
-            </a:r>
-            <a:r>
-              <a:rPr lang="en-US" dirty="0" err="1"/>
-              <a:t>ing</a:t>
-            </a:r>
-            <a:endParaRPr lang="en-US" dirty="0"/>
+              <a:t>Something Weird!</a:t>
+            </a:r>
           </a:p>
         </p:txBody>
       </p:sp>
@@ -6811,7 +6879,7 @@
           <p:cNvPr id="3" name="Content Placeholder 2">
             <a:extLst>
               <a:ext uri="{FF2B5EF4-FFF2-40B4-BE49-F238E27FC236}">
-                <a16:creationId xmlns:a16="http://schemas.microsoft.com/office/drawing/2014/main" id="{397923F8-AE60-DAAE-C255-0D5C34C71AC2}"/>
+                <a16:creationId xmlns:a16="http://schemas.microsoft.com/office/drawing/2014/main" id="{E3E974AF-233E-0DB4-053E-917DB605B8F3}"/>
               </a:ext>
             </a:extLst>
           </p:cNvPr>
@@ -6824,76 +6892,247 @@
         </p:nvSpPr>
         <p:spPr>
           <a:xfrm>
-            <a:off x="1451579" y="2015732"/>
-            <a:ext cx="9603275" cy="4037749"/>
-          </a:xfrm>
-        </p:spPr>
-        <p:txBody>
-          <a:bodyPr/>
-          <a:lstStyle/>
-          <a:p>
-            <a:r>
-              <a:rPr lang="en-US" dirty="0"/>
-              <a:t>This EDA process is something we want to do when we load any data. </a:t>
-            </a:r>
-          </a:p>
-          <a:p>
-            <a:r>
-              <a:rPr lang="en-US" dirty="0"/>
-              <a:t>ML intended datasets often have few errors or issues to find. </a:t>
-            </a:r>
-          </a:p>
-          <a:p>
-            <a:r>
-              <a:rPr lang="en-US" dirty="0"/>
-              <a:t>When using real world data this process is usually more involved. </a:t>
-            </a:r>
-          </a:p>
-          <a:p>
-            <a:pPr lvl="1"/>
-            <a:r>
-              <a:rPr lang="en-US" dirty="0"/>
-              <a:t>We want a dataset with no ‘junk’, so we need to find it in EDA. </a:t>
-            </a:r>
-          </a:p>
-          <a:p>
-            <a:pPr lvl="1"/>
-            <a:r>
-              <a:rPr lang="en-US" dirty="0"/>
-              <a:t>Some domain knowledge is required to do a really good job here. </a:t>
-            </a:r>
-          </a:p>
-          <a:p>
-            <a:r>
-              <a:rPr lang="en-US" dirty="0"/>
-              <a:t>The EDA process will guide future behaviors. </a:t>
-            </a:r>
-          </a:p>
-          <a:p>
-            <a:pPr lvl="1"/>
-            <a:r>
-              <a:rPr lang="en-US" dirty="0"/>
-              <a:t>Do we see anything in the data that we want to investigate further? </a:t>
-            </a:r>
-          </a:p>
-          <a:p>
-            <a:pPr lvl="1"/>
-            <a:r>
-              <a:rPr lang="en-US" dirty="0"/>
-              <a:t>What cleaning/preparation steps do we need to build into </a:t>
-            </a:r>
-            <a:r>
-              <a:rPr lang="en-US"/>
-              <a:t>our pipeline? </a:t>
-            </a:r>
-            <a:endParaRPr lang="en-US" dirty="0"/>
-          </a:p>
-        </p:txBody>
-      </p:sp>
+            <a:off x="8669278" y="2015732"/>
+            <a:ext cx="3522721" cy="4119254"/>
+          </a:xfrm>
+        </p:spPr>
+        <p:txBody>
+          <a:bodyPr/>
+          <a:lstStyle/>
+          <a:p>
+            <a:r>
+              <a:rPr lang="en-US" dirty="0"/>
+              <a:t>This dataset shows a clear separation of one class from the other two. </a:t>
+            </a:r>
+          </a:p>
+          <a:p>
+            <a:r>
+              <a:rPr lang="en-US" dirty="0"/>
+              <a:t>This may guide us…</a:t>
+            </a:r>
+          </a:p>
+          <a:p>
+            <a:pPr lvl="1"/>
+            <a:r>
+              <a:rPr lang="en-US" dirty="0"/>
+              <a:t>If we want to classify, that division helps. </a:t>
+            </a:r>
+          </a:p>
+          <a:p>
+            <a:pPr lvl="1"/>
+            <a:r>
+              <a:rPr lang="en-US" dirty="0"/>
+              <a:t>If that value is a feature, maybe it is better categorical. (??)</a:t>
+            </a:r>
+          </a:p>
+        </p:txBody>
+      </p:sp>
+      <p:pic>
+        <p:nvPicPr>
+          <p:cNvPr id="1026" name="Picture 2" descr="Fundamentals of Exploratory Data Analysis with Python Implementation">
+            <a:extLst>
+              <a:ext uri="{FF2B5EF4-FFF2-40B4-BE49-F238E27FC236}">
+                <a16:creationId xmlns:a16="http://schemas.microsoft.com/office/drawing/2014/main" id="{BC0AE3D8-EB56-C1D7-273C-DF74389A7933}"/>
+              </a:ext>
+            </a:extLst>
+          </p:cNvPr>
+          <p:cNvPicPr>
+            <a:picLocks noChangeAspect="1" noChangeArrowheads="1"/>
+          </p:cNvPicPr>
+          <p:nvPr/>
+        </p:nvPicPr>
+        <p:blipFill>
+          <a:blip r:embed="rId2">
+            <a:extLst>
+              <a:ext uri="{28A0092B-C50C-407E-A947-70E740481C1C}">
+                <a14:useLocalDpi xmlns:a14="http://schemas.microsoft.com/office/drawing/2010/main" val="0"/>
+              </a:ext>
+            </a:extLst>
+          </a:blip>
+          <a:srcRect/>
+          <a:stretch>
+            <a:fillRect/>
+          </a:stretch>
+        </p:blipFill>
+        <p:spPr bwMode="auto">
+          <a:xfrm>
+            <a:off x="180753" y="1853754"/>
+            <a:ext cx="8488526" cy="4203368"/>
+          </a:xfrm>
+          <a:prstGeom prst="rect">
+            <a:avLst/>
+          </a:prstGeom>
+          <a:noFill/>
+          <a:extLst>
+            <a:ext uri="{909E8E84-426E-40DD-AFC4-6F175D3DCCD1}">
+              <a14:hiddenFill xmlns:a14="http://schemas.microsoft.com/office/drawing/2010/main">
+                <a:solidFill>
+                  <a:srgbClr val="FFFFFF"/>
+                </a:solidFill>
+              </a14:hiddenFill>
+            </a:ext>
+          </a:extLst>
+        </p:spPr>
+      </p:pic>
     </p:spTree>
     <p:extLst>
       <p:ext uri="{BB962C8B-B14F-4D97-AF65-F5344CB8AC3E}">
-        <p14:creationId xmlns:p14="http://schemas.microsoft.com/office/powerpoint/2010/main" val="2807728476"/>
+        <p14:creationId xmlns:p14="http://schemas.microsoft.com/office/powerpoint/2010/main" val="1405714686"/>
+      </p:ext>
+    </p:extLst>
+  </p:cSld>
+  <p:clrMapOvr>
+    <a:masterClrMapping/>
+  </p:clrMapOvr>
+</p:sld>
+</file>
+
+<file path=ppt/slides/slide29.xml><?xml version="1.0" encoding="utf-8"?>
+<p:sld xmlns:a="http://schemas.openxmlformats.org/drawingml/2006/main" xmlns:r="http://schemas.openxmlformats.org/officeDocument/2006/relationships" xmlns:p="http://schemas.openxmlformats.org/presentationml/2006/main">
+  <p:cSld>
+    <p:spTree>
+      <p:nvGrpSpPr>
+        <p:cNvPr id="1" name=""/>
+        <p:cNvGrpSpPr/>
+        <p:nvPr/>
+      </p:nvGrpSpPr>
+      <p:grpSpPr>
+        <a:xfrm>
+          <a:off x="0" y="0"/>
+          <a:ext cx="0" cy="0"/>
+          <a:chOff x="0" y="0"/>
+          <a:chExt cx="0" cy="0"/>
+        </a:xfrm>
+      </p:grpSpPr>
+      <p:sp>
+        <p:nvSpPr>
+          <p:cNvPr id="2" name="Title 1">
+            <a:extLst>
+              <a:ext uri="{FF2B5EF4-FFF2-40B4-BE49-F238E27FC236}">
+                <a16:creationId xmlns:a16="http://schemas.microsoft.com/office/drawing/2014/main" id="{43CC361B-31A2-BBC7-8128-D8B8C25AD75B}"/>
+              </a:ext>
+            </a:extLst>
+          </p:cNvPr>
+          <p:cNvSpPr>
+            <a:spLocks noGrp="1"/>
+          </p:cNvSpPr>
+          <p:nvPr>
+            <p:ph type="title"/>
+          </p:nvPr>
+        </p:nvSpPr>
+        <p:spPr>
+          <a:xfrm>
+            <a:off x="1451580" y="804519"/>
+            <a:ext cx="3468084" cy="1049235"/>
+          </a:xfrm>
+        </p:spPr>
+        <p:txBody>
+          <a:bodyPr/>
+          <a:lstStyle/>
+          <a:p>
+            <a:r>
+              <a:rPr lang="en-US" dirty="0"/>
+              <a:t>Outliers and Categorical</a:t>
+            </a:r>
+          </a:p>
+        </p:txBody>
+      </p:sp>
+      <p:sp>
+        <p:nvSpPr>
+          <p:cNvPr id="3" name="Content Placeholder 2">
+            <a:extLst>
+              <a:ext uri="{FF2B5EF4-FFF2-40B4-BE49-F238E27FC236}">
+                <a16:creationId xmlns:a16="http://schemas.microsoft.com/office/drawing/2014/main" id="{6500D048-50A6-B407-5D37-96849F79C2CF}"/>
+              </a:ext>
+            </a:extLst>
+          </p:cNvPr>
+          <p:cNvSpPr>
+            <a:spLocks noGrp="1"/>
+          </p:cNvSpPr>
+          <p:nvPr>
+            <p:ph idx="1"/>
+          </p:nvPr>
+        </p:nvSpPr>
+        <p:spPr>
+          <a:xfrm>
+            <a:off x="1" y="2015732"/>
+            <a:ext cx="4805916" cy="3906603"/>
+          </a:xfrm>
+        </p:spPr>
+        <p:txBody>
+          <a:bodyPr/>
+          <a:lstStyle/>
+          <a:p>
+            <a:r>
+              <a:rPr lang="en-US" dirty="0"/>
+              <a:t>This data appears to have outliers. </a:t>
+            </a:r>
+          </a:p>
+          <a:p>
+            <a:r>
+              <a:rPr lang="en-US" dirty="0"/>
+              <a:t>The last column appears to be better as categorical. </a:t>
+            </a:r>
+          </a:p>
+          <a:p>
+            <a:r>
+              <a:rPr lang="en-US" dirty="0"/>
+              <a:t>The ‘hour’ column has a weird distribution – depending on what I am doing, this might matter. </a:t>
+            </a:r>
+          </a:p>
+        </p:txBody>
+      </p:sp>
+      <p:pic>
+        <p:nvPicPr>
+          <p:cNvPr id="3078" name="Picture 6" descr="distributions - How to interpret pairplots() - Cross Validated">
+            <a:extLst>
+              <a:ext uri="{FF2B5EF4-FFF2-40B4-BE49-F238E27FC236}">
+                <a16:creationId xmlns:a16="http://schemas.microsoft.com/office/drawing/2014/main" id="{03CF9A95-830B-82D9-D993-2BEF2843CF4D}"/>
+              </a:ext>
+            </a:extLst>
+          </p:cNvPr>
+          <p:cNvPicPr>
+            <a:picLocks noChangeAspect="1" noChangeArrowheads="1"/>
+          </p:cNvPicPr>
+          <p:nvPr/>
+        </p:nvPicPr>
+        <p:blipFill>
+          <a:blip r:embed="rId2">
+            <a:extLst>
+              <a:ext uri="{28A0092B-C50C-407E-A947-70E740481C1C}">
+                <a14:useLocalDpi xmlns:a14="http://schemas.microsoft.com/office/drawing/2010/main" val="0"/>
+              </a:ext>
+            </a:extLst>
+          </a:blip>
+          <a:srcRect/>
+          <a:stretch>
+            <a:fillRect/>
+          </a:stretch>
+        </p:blipFill>
+        <p:spPr bwMode="auto">
+          <a:xfrm>
+            <a:off x="4919663" y="0"/>
+            <a:ext cx="7272337" cy="6858000"/>
+          </a:xfrm>
+          <a:prstGeom prst="rect">
+            <a:avLst/>
+          </a:prstGeom>
+          <a:noFill/>
+          <a:extLst>
+            <a:ext uri="{909E8E84-426E-40DD-AFC4-6F175D3DCCD1}">
+              <a14:hiddenFill xmlns:a14="http://schemas.microsoft.com/office/drawing/2010/main">
+                <a:solidFill>
+                  <a:srgbClr val="FFFFFF"/>
+                </a:solidFill>
+              </a14:hiddenFill>
+            </a:ext>
+          </a:extLst>
+        </p:spPr>
+      </p:pic>
+    </p:spTree>
+    <p:extLst>
+      <p:ext uri="{BB962C8B-B14F-4D97-AF65-F5344CB8AC3E}">
+        <p14:creationId xmlns:p14="http://schemas.microsoft.com/office/powerpoint/2010/main" val="4043875854"/>
       </p:ext>
     </p:extLst>
   </p:cSld>
@@ -7072,6 +7311,148 @@
     <p:extLst>
       <p:ext uri="{BB962C8B-B14F-4D97-AF65-F5344CB8AC3E}">
         <p14:creationId xmlns:p14="http://schemas.microsoft.com/office/powerpoint/2010/main" val="23350946"/>
+      </p:ext>
+    </p:extLst>
+  </p:cSld>
+  <p:clrMapOvr>
+    <a:masterClrMapping/>
+  </p:clrMapOvr>
+</p:sld>
+</file>
+
+<file path=ppt/slides/slide30.xml><?xml version="1.0" encoding="utf-8"?>
+<p:sld xmlns:a="http://schemas.openxmlformats.org/drawingml/2006/main" xmlns:r="http://schemas.openxmlformats.org/officeDocument/2006/relationships" xmlns:p="http://schemas.openxmlformats.org/presentationml/2006/main">
+  <p:cSld>
+    <p:spTree>
+      <p:nvGrpSpPr>
+        <p:cNvPr id="1" name=""/>
+        <p:cNvGrpSpPr/>
+        <p:nvPr/>
+      </p:nvGrpSpPr>
+      <p:grpSpPr>
+        <a:xfrm>
+          <a:off x="0" y="0"/>
+          <a:ext cx="0" cy="0"/>
+          <a:chOff x="0" y="0"/>
+          <a:chExt cx="0" cy="0"/>
+        </a:xfrm>
+      </p:grpSpPr>
+      <p:sp>
+        <p:nvSpPr>
+          <p:cNvPr id="2" name="Title 1">
+            <a:extLst>
+              <a:ext uri="{FF2B5EF4-FFF2-40B4-BE49-F238E27FC236}">
+                <a16:creationId xmlns:a16="http://schemas.microsoft.com/office/drawing/2014/main" id="{A0A2B0D2-0D58-554E-D694-76BAC3DD2921}"/>
+              </a:ext>
+            </a:extLst>
+          </p:cNvPr>
+          <p:cNvSpPr>
+            <a:spLocks noGrp="1"/>
+          </p:cNvSpPr>
+          <p:nvPr>
+            <p:ph type="title"/>
+          </p:nvPr>
+        </p:nvSpPr>
+        <p:spPr/>
+        <p:txBody>
+          <a:bodyPr/>
+          <a:lstStyle/>
+          <a:p>
+            <a:r>
+              <a:rPr lang="en-US" dirty="0"/>
+              <a:t>Get EDA-</a:t>
+            </a:r>
+            <a:r>
+              <a:rPr lang="en-US" dirty="0" err="1"/>
+              <a:t>ing</a:t>
+            </a:r>
+            <a:endParaRPr lang="en-US" dirty="0"/>
+          </a:p>
+        </p:txBody>
+      </p:sp>
+      <p:sp>
+        <p:nvSpPr>
+          <p:cNvPr id="3" name="Content Placeholder 2">
+            <a:extLst>
+              <a:ext uri="{FF2B5EF4-FFF2-40B4-BE49-F238E27FC236}">
+                <a16:creationId xmlns:a16="http://schemas.microsoft.com/office/drawing/2014/main" id="{397923F8-AE60-DAAE-C255-0D5C34C71AC2}"/>
+              </a:ext>
+            </a:extLst>
+          </p:cNvPr>
+          <p:cNvSpPr>
+            <a:spLocks noGrp="1"/>
+          </p:cNvSpPr>
+          <p:nvPr>
+            <p:ph idx="1"/>
+          </p:nvPr>
+        </p:nvSpPr>
+        <p:spPr>
+          <a:xfrm>
+            <a:off x="1451579" y="2015732"/>
+            <a:ext cx="9603275" cy="4037749"/>
+          </a:xfrm>
+        </p:spPr>
+        <p:txBody>
+          <a:bodyPr/>
+          <a:lstStyle/>
+          <a:p>
+            <a:r>
+              <a:rPr lang="en-US" dirty="0"/>
+              <a:t>This EDA process is something we want to do when we load any data. </a:t>
+            </a:r>
+          </a:p>
+          <a:p>
+            <a:r>
+              <a:rPr lang="en-US" dirty="0"/>
+              <a:t>ML intended datasets often have few errors or issues to find. </a:t>
+            </a:r>
+          </a:p>
+          <a:p>
+            <a:r>
+              <a:rPr lang="en-US" dirty="0"/>
+              <a:t>When using real world data this process is usually more involved. </a:t>
+            </a:r>
+          </a:p>
+          <a:p>
+            <a:pPr lvl="1"/>
+            <a:r>
+              <a:rPr lang="en-US" dirty="0"/>
+              <a:t>We want a dataset with no ‘junk’, so we need to find it in EDA. </a:t>
+            </a:r>
+          </a:p>
+          <a:p>
+            <a:pPr lvl="1"/>
+            <a:r>
+              <a:rPr lang="en-US" dirty="0"/>
+              <a:t>Some domain knowledge is required to do a really good job here. </a:t>
+            </a:r>
+          </a:p>
+          <a:p>
+            <a:r>
+              <a:rPr lang="en-US" dirty="0"/>
+              <a:t>The EDA process will guide future behaviors. </a:t>
+            </a:r>
+          </a:p>
+          <a:p>
+            <a:pPr lvl="1"/>
+            <a:r>
+              <a:rPr lang="en-US" dirty="0"/>
+              <a:t>Do we see anything in the data that we want to investigate further? </a:t>
+            </a:r>
+          </a:p>
+          <a:p>
+            <a:pPr lvl="1"/>
+            <a:r>
+              <a:rPr lang="en-US" dirty="0"/>
+              <a:t>What cleaning/preparation steps do we need to build into our pipeline? </a:t>
+            </a:r>
+          </a:p>
+        </p:txBody>
+      </p:sp>
+    </p:spTree>
+    <p:extLst>
+      <p:ext uri="{BB962C8B-B14F-4D97-AF65-F5344CB8AC3E}">
+        <p14:creationId xmlns:p14="http://schemas.microsoft.com/office/powerpoint/2010/main" val="2807728476"/>
       </p:ext>
     </p:extLst>
   </p:cSld>
@@ -7302,7 +7683,7 @@
           <p:cNvPr id="2" name="Title 1">
             <a:extLst>
               <a:ext uri="{FF2B5EF4-FFF2-40B4-BE49-F238E27FC236}">
-                <a16:creationId xmlns:a16="http://schemas.microsoft.com/office/drawing/2014/main" id="{490D845B-FF2C-F36D-DEF4-8E1B14E8A159}"/>
+                <a16:creationId xmlns:a16="http://schemas.microsoft.com/office/drawing/2014/main" id="{CBE4A4C7-1FB4-9786-1A54-34A5C206D00C}"/>
               </a:ext>
             </a:extLst>
           </p:cNvPr>
@@ -7320,7 +7701,7 @@
           <a:p>
             <a:r>
               <a:rPr lang="en-US" dirty="0"/>
-              <a:t>Reexamining Fit – R Squared</a:t>
+              <a:t>Residual Drama</a:t>
             </a:r>
           </a:p>
         </p:txBody>
@@ -7330,7 +7711,7 @@
           <p:cNvPr id="3" name="Content Placeholder 2">
             <a:extLst>
               <a:ext uri="{FF2B5EF4-FFF2-40B4-BE49-F238E27FC236}">
-                <a16:creationId xmlns:a16="http://schemas.microsoft.com/office/drawing/2014/main" id="{D990A26F-9EB3-1F40-ED20-68B5F6887EA9}"/>
+                <a16:creationId xmlns:a16="http://schemas.microsoft.com/office/drawing/2014/main" id="{838F99D2-A041-85BE-CDC4-8EED8B745885}"/>
               </a:ext>
             </a:extLst>
           </p:cNvPr>
@@ -7343,51 +7724,96 @@
         </p:nvSpPr>
         <p:spPr>
           <a:xfrm>
-            <a:off x="1451579" y="2015732"/>
-            <a:ext cx="9603275" cy="4037749"/>
-          </a:xfrm>
-        </p:spPr>
-        <p:txBody>
-          <a:bodyPr/>
-          <a:lstStyle/>
-          <a:p>
-            <a:r>
-              <a:rPr lang="en-US" dirty="0"/>
-              <a:t>In predictive modeling we often use a different metric for quality along with RMSE – R2. </a:t>
-            </a:r>
-          </a:p>
-          <a:p>
-            <a:r>
-              <a:rPr lang="en-US" dirty="0"/>
-              <a:t>R squared, or R2 is the coefficient of determination. </a:t>
-            </a:r>
-          </a:p>
-          <a:p>
-            <a:pPr lvl="1"/>
-            <a:r>
-              <a:rPr lang="en-US" dirty="0"/>
-              <a:t>This measures the amount of variance that is explained by the model. </a:t>
-            </a:r>
-          </a:p>
-          <a:p>
-            <a:pPr lvl="1"/>
-            <a:r>
-              <a:rPr lang="en-US" dirty="0"/>
-              <a:t>It is also the square of the correlation. </a:t>
-            </a:r>
-          </a:p>
-          <a:p>
-            <a:r>
-              <a:rPr lang="en-US" dirty="0"/>
-              <a:t>I think it is easiest to think of it in terms of variance, in a few steps. </a:t>
-            </a:r>
-          </a:p>
-        </p:txBody>
-      </p:sp>
+            <a:off x="7984793" y="2015732"/>
+            <a:ext cx="4125691" cy="4059147"/>
+          </a:xfrm>
+        </p:spPr>
+        <p:txBody>
+          <a:bodyPr/>
+          <a:lstStyle/>
+          <a:p>
+            <a:r>
+              <a:rPr lang="en-US" dirty="0"/>
+              <a:t>We can average our residuals to get MSE. </a:t>
+            </a:r>
+          </a:p>
+          <a:p>
+            <a:r>
+              <a:rPr lang="en-US" dirty="0"/>
+              <a:t>MSE/RMSE expresses accuracy of model. </a:t>
+            </a:r>
+          </a:p>
+          <a:p>
+            <a:r>
+              <a:rPr lang="en-US" dirty="0"/>
+              <a:t>We can also look at residuals. </a:t>
+            </a:r>
+          </a:p>
+          <a:p>
+            <a:r>
+              <a:rPr lang="en-US" dirty="0"/>
+              <a:t>If there’s a pattern in residuals, it wasn’t captured by the model. </a:t>
+            </a:r>
+          </a:p>
+          <a:p>
+            <a:r>
+              <a:rPr lang="en-US" dirty="0"/>
+              <a:t>Ideally the model should ‘explain’ all of the variance in Y. </a:t>
+            </a:r>
+          </a:p>
+        </p:txBody>
+      </p:sp>
+      <p:pic>
+        <p:nvPicPr>
+          <p:cNvPr id="5122" name="Picture 2" descr="Interpreting Residual Plots to Improve Your Regression">
+            <a:extLst>
+              <a:ext uri="{FF2B5EF4-FFF2-40B4-BE49-F238E27FC236}">
+                <a16:creationId xmlns:a16="http://schemas.microsoft.com/office/drawing/2014/main" id="{6B7E5249-4723-64B5-421D-B575AEA53DDB}"/>
+              </a:ext>
+            </a:extLst>
+          </p:cNvPr>
+          <p:cNvPicPr>
+            <a:picLocks noChangeAspect="1" noChangeArrowheads="1"/>
+          </p:cNvPicPr>
+          <p:nvPr/>
+        </p:nvPicPr>
+        <p:blipFill rotWithShape="1">
+          <a:blip r:embed="rId2">
+            <a:extLst>
+              <a:ext uri="{28A0092B-C50C-407E-A947-70E740481C1C}">
+                <a14:useLocalDpi xmlns:a14="http://schemas.microsoft.com/office/drawing/2010/main" val="0"/>
+              </a:ext>
+            </a:extLst>
+          </a:blip>
+          <a:srcRect b="6047"/>
+          <a:stretch>
+            <a:fillRect/>
+          </a:stretch>
+        </p:blipFill>
+        <p:spPr bwMode="auto">
+          <a:xfrm>
+            <a:off x="173384" y="1853754"/>
+            <a:ext cx="7811409" cy="4221125"/>
+          </a:xfrm>
+          <a:prstGeom prst="rect">
+            <a:avLst/>
+          </a:prstGeom>
+          <a:noFill/>
+          <a:extLst>
+            <a:ext uri="{909E8E84-426E-40DD-AFC4-6F175D3DCCD1}">
+              <a14:hiddenFill xmlns:a14="http://schemas.microsoft.com/office/drawing/2010/main">
+                <a:solidFill>
+                  <a:srgbClr val="FFFFFF"/>
+                </a:solidFill>
+              </a14:hiddenFill>
+            </a:ext>
+          </a:extLst>
+        </p:spPr>
+      </p:pic>
     </p:spTree>
     <p:extLst>
       <p:ext uri="{BB962C8B-B14F-4D97-AF65-F5344CB8AC3E}">
-        <p14:creationId xmlns:p14="http://schemas.microsoft.com/office/powerpoint/2010/main" val="2634301341"/>
+        <p14:creationId xmlns:p14="http://schemas.microsoft.com/office/powerpoint/2010/main" val="3240271174"/>
       </p:ext>
     </p:extLst>
   </p:cSld>
@@ -7419,7 +7845,7 @@
           <p:cNvPr id="2" name="Title 1">
             <a:extLst>
               <a:ext uri="{FF2B5EF4-FFF2-40B4-BE49-F238E27FC236}">
-                <a16:creationId xmlns:a16="http://schemas.microsoft.com/office/drawing/2014/main" id="{0507D6C5-A8AB-509C-41B6-10B5AF5271F7}"/>
+                <a16:creationId xmlns:a16="http://schemas.microsoft.com/office/drawing/2014/main" id="{C9831A6C-1597-9819-A739-084ABBBC2344}"/>
               </a:ext>
             </a:extLst>
           </p:cNvPr>
@@ -7430,111 +7856,71 @@
             <p:ph type="title"/>
           </p:nvPr>
         </p:nvSpPr>
+        <p:spPr/>
+        <p:txBody>
+          <a:bodyPr/>
+          <a:lstStyle/>
+          <a:p>
+            <a:r>
+              <a:rPr lang="en-US" dirty="0"/>
+              <a:t>Models need to </a:t>
+            </a:r>
+            <a:r>
+              <a:rPr lang="en-US" dirty="0" err="1"/>
+              <a:t>fiT</a:t>
+            </a:r>
+            <a:r>
+              <a:rPr lang="en-US" dirty="0"/>
+              <a:t>!</a:t>
+            </a:r>
+          </a:p>
+        </p:txBody>
+      </p:sp>
+      <p:sp>
+        <p:nvSpPr>
+          <p:cNvPr id="3" name="Content Placeholder 2">
+            <a:extLst>
+              <a:ext uri="{FF2B5EF4-FFF2-40B4-BE49-F238E27FC236}">
+                <a16:creationId xmlns:a16="http://schemas.microsoft.com/office/drawing/2014/main" id="{5CD2CB47-48BC-C14F-977D-58522C28CA74}"/>
+              </a:ext>
+            </a:extLst>
+          </p:cNvPr>
+          <p:cNvSpPr>
+            <a:spLocks noGrp="1"/>
+          </p:cNvSpPr>
+          <p:nvPr>
+            <p:ph idx="1"/>
+          </p:nvPr>
+        </p:nvSpPr>
         <p:spPr>
           <a:xfrm>
-            <a:off x="778477" y="804519"/>
-            <a:ext cx="10276378" cy="1049235"/>
-          </a:xfrm>
-        </p:spPr>
-        <p:txBody>
-          <a:bodyPr/>
-          <a:lstStyle/>
-          <a:p>
-            <a:r>
-              <a:rPr lang="en-US" dirty="0"/>
-              <a:t>Variance – Our data varies</a:t>
-            </a:r>
-          </a:p>
-        </p:txBody>
-      </p:sp>
-      <p:sp>
-        <p:nvSpPr>
-          <p:cNvPr id="3" name="Content Placeholder 2">
-            <a:extLst>
-              <a:ext uri="{FF2B5EF4-FFF2-40B4-BE49-F238E27FC236}">
-                <a16:creationId xmlns:a16="http://schemas.microsoft.com/office/drawing/2014/main" id="{C18B5CDD-C7C6-04CD-AA50-BDA0EAE527F8}"/>
-              </a:ext>
-            </a:extLst>
-          </p:cNvPr>
-          <p:cNvSpPr>
-            <a:spLocks noGrp="1"/>
-          </p:cNvSpPr>
-          <p:nvPr>
-            <p:ph idx="1"/>
-          </p:nvPr>
-        </p:nvSpPr>
-        <p:spPr>
-          <a:xfrm>
-            <a:off x="1201479" y="2015732"/>
-            <a:ext cx="9853375" cy="4037749"/>
-          </a:xfrm>
-        </p:spPr>
-        <p:txBody>
-          <a:bodyPr/>
-          <a:lstStyle/>
-          <a:p>
-            <a:r>
-              <a:rPr lang="en-US" dirty="0"/>
-              <a:t>We can think of our target, y, in terms of its variance. </a:t>
-            </a:r>
-          </a:p>
-          <a:p>
-            <a:pPr lvl="1"/>
-            <a:r>
-              <a:rPr lang="en-US" dirty="0"/>
-              <a:t>Y varies – it literally has different values for different x inputs. </a:t>
-            </a:r>
-          </a:p>
-          <a:p>
-            <a:pPr lvl="1"/>
-            <a:r>
-              <a:rPr lang="en-US" dirty="0"/>
-              <a:t>We can measure that amount of </a:t>
-            </a:r>
-            <a:r>
-              <a:rPr lang="en-US" dirty="0" err="1"/>
-              <a:t>varaiance</a:t>
-            </a:r>
-            <a:r>
-              <a:rPr lang="en-US" dirty="0"/>
-              <a:t> by measuring how far values are from the mean. </a:t>
-            </a:r>
-          </a:p>
-          <a:p>
-            <a:r>
-              <a:rPr lang="en-US" dirty="0"/>
-              <a:t>This is known as SST or sum of squares total. </a:t>
-            </a:r>
-          </a:p>
-          <a:p>
-            <a:pPr lvl="1"/>
-            <a:r>
-              <a:rPr lang="en-US" dirty="0"/>
-              <a:t>It’s also the top of the variance calculation. </a:t>
-            </a:r>
-          </a:p>
-          <a:p>
-            <a:pPr lvl="1"/>
-            <a:r>
-              <a:rPr lang="en-US" dirty="0"/>
-              <a:t>This measures how much the real values vary from the mean – a baseline. </a:t>
-            </a:r>
-          </a:p>
-          <a:p>
-            <a:pPr lvl="1"/>
-            <a:r>
-              <a:rPr lang="en-US" dirty="0"/>
-              <a:t>I.e. (thought model, not def.) the model is attempting to tell us Y, think of the default value for Y that it tells us to be the mean, this tells us how much the model must ‘move’ from that default. </a:t>
+            <a:off x="1451579" y="1853754"/>
+            <a:ext cx="9603275" cy="3612591"/>
+          </a:xfrm>
+        </p:spPr>
+        <p:txBody>
+          <a:bodyPr/>
+          <a:lstStyle/>
+          <a:p>
+            <a:r>
+              <a:rPr lang="en-US" dirty="0"/>
+              <a:t>A model is a good fit if it follows the data. </a:t>
+            </a:r>
+          </a:p>
+          <a:p>
+            <a:r>
+              <a:rPr lang="en-US" dirty="0"/>
+              <a:t>A model that fits gives good predictions!</a:t>
             </a:r>
           </a:p>
         </p:txBody>
       </p:sp>
       <p:pic>
         <p:nvPicPr>
-          <p:cNvPr id="3074" name="Picture 2" descr="SST = SSR + SSE in regression ...">
+          <p:cNvPr id="4098" name="Picture 2" descr="Curve Fitting using Linear and Nonlinear Regression - GeeksforGeeks">
             <a:extLst>
               <a:ext uri="{FF2B5EF4-FFF2-40B4-BE49-F238E27FC236}">
-                <a16:creationId xmlns:a16="http://schemas.microsoft.com/office/drawing/2014/main" id="{81384808-AB71-34AB-1FA1-CF4B9F5A7008}"/>
+                <a16:creationId xmlns:a16="http://schemas.microsoft.com/office/drawing/2014/main" id="{D4C8D90A-1A38-CFAA-5440-98A163B081B0}"/>
               </a:ext>
             </a:extLst>
           </p:cNvPr>
@@ -7558,8 +7944,8 @@
         </p:blipFill>
         <p:spPr bwMode="auto">
           <a:xfrm>
-            <a:off x="7264400" y="202754"/>
-            <a:ext cx="4927600" cy="1651000"/>
+            <a:off x="6557960" y="0"/>
+            <a:ext cx="5634040" cy="4561367"/>
           </a:xfrm>
           <a:prstGeom prst="rect">
             <a:avLst/>
@@ -7576,10 +7962,57 @@
           </a:extLst>
         </p:spPr>
       </p:pic>
+      <p:pic>
+        <p:nvPicPr>
+          <p:cNvPr id="4100" name="Picture 4" descr="Does linear regression mean the model fit line has to be straight? - Cross  Validated">
+            <a:extLst>
+              <a:ext uri="{FF2B5EF4-FFF2-40B4-BE49-F238E27FC236}">
+                <a16:creationId xmlns:a16="http://schemas.microsoft.com/office/drawing/2014/main" id="{7739A5AB-8E60-C31D-4272-0F74A100DBE6}"/>
+              </a:ext>
+            </a:extLst>
+          </p:cNvPr>
+          <p:cNvPicPr>
+            <a:picLocks noChangeAspect="1" noChangeArrowheads="1"/>
+          </p:cNvPicPr>
+          <p:nvPr/>
+        </p:nvPicPr>
+        <p:blipFill>
+          <a:blip r:embed="rId3">
+            <a:extLst>
+              <a:ext uri="{28A0092B-C50C-407E-A947-70E740481C1C}">
+                <a14:useLocalDpi xmlns:a14="http://schemas.microsoft.com/office/drawing/2010/main" val="0"/>
+              </a:ext>
+            </a:extLst>
+          </a:blip>
+          <a:srcRect/>
+          <a:stretch>
+            <a:fillRect/>
+          </a:stretch>
+        </p:blipFill>
+        <p:spPr bwMode="auto">
+          <a:xfrm>
+            <a:off x="0" y="2961155"/>
+            <a:ext cx="5252484" cy="3939363"/>
+          </a:xfrm>
+          <a:prstGeom prst="rect">
+            <a:avLst/>
+          </a:prstGeom>
+          <a:noFill/>
+          <a:extLst>
+            <a:ext uri="{909E8E84-426E-40DD-AFC4-6F175D3DCCD1}">
+              <a14:hiddenFill xmlns:a14="http://schemas.microsoft.com/office/drawing/2010/main">
+                <a:solidFill>
+                  <a:srgbClr val="FFFFFF"/>
+                </a:solidFill>
+              </a14:hiddenFill>
+            </a:ext>
+          </a:extLst>
+        </p:spPr>
+      </p:pic>
     </p:spTree>
     <p:extLst>
       <p:ext uri="{BB962C8B-B14F-4D97-AF65-F5344CB8AC3E}">
-        <p14:creationId xmlns:p14="http://schemas.microsoft.com/office/powerpoint/2010/main" val="3189705387"/>
+        <p14:creationId xmlns:p14="http://schemas.microsoft.com/office/powerpoint/2010/main" val="2051441261"/>
       </p:ext>
     </p:extLst>
   </p:cSld>
@@ -7611,7 +8044,7 @@
           <p:cNvPr id="2" name="Title 1">
             <a:extLst>
               <a:ext uri="{FF2B5EF4-FFF2-40B4-BE49-F238E27FC236}">
-                <a16:creationId xmlns:a16="http://schemas.microsoft.com/office/drawing/2014/main" id="{7B5929C5-3292-71F4-42DC-C1786154E484}"/>
+                <a16:creationId xmlns:a16="http://schemas.microsoft.com/office/drawing/2014/main" id="{490D845B-FF2C-F36D-DEF4-8E1B14E8A159}"/>
               </a:ext>
             </a:extLst>
           </p:cNvPr>
@@ -7622,146 +8055,81 @@
             <p:ph type="title"/>
           </p:nvPr>
         </p:nvSpPr>
+        <p:spPr/>
+        <p:txBody>
+          <a:bodyPr/>
+          <a:lstStyle/>
+          <a:p>
+            <a:r>
+              <a:rPr lang="en-US" dirty="0"/>
+              <a:t>Reexamining Fit – R Squared</a:t>
+            </a:r>
+          </a:p>
+        </p:txBody>
+      </p:sp>
+      <p:sp>
+        <p:nvSpPr>
+          <p:cNvPr id="3" name="Content Placeholder 2">
+            <a:extLst>
+              <a:ext uri="{FF2B5EF4-FFF2-40B4-BE49-F238E27FC236}">
+                <a16:creationId xmlns:a16="http://schemas.microsoft.com/office/drawing/2014/main" id="{D990A26F-9EB3-1F40-ED20-68B5F6887EA9}"/>
+              </a:ext>
+            </a:extLst>
+          </p:cNvPr>
+          <p:cNvSpPr>
+            <a:spLocks noGrp="1"/>
+          </p:cNvSpPr>
+          <p:nvPr>
+            <p:ph idx="1"/>
+          </p:nvPr>
+        </p:nvSpPr>
         <p:spPr>
           <a:xfrm>
-            <a:off x="7311974" y="804519"/>
-            <a:ext cx="3742880" cy="1049235"/>
-          </a:xfrm>
-        </p:spPr>
-        <p:txBody>
-          <a:bodyPr/>
-          <a:lstStyle/>
-          <a:p>
-            <a:r>
-              <a:rPr lang="en-US" dirty="0"/>
-              <a:t>Break that apart</a:t>
-            </a:r>
-          </a:p>
-        </p:txBody>
-      </p:sp>
-      <p:sp>
-        <p:nvSpPr>
-          <p:cNvPr id="3" name="Content Placeholder 2">
-            <a:extLst>
-              <a:ext uri="{FF2B5EF4-FFF2-40B4-BE49-F238E27FC236}">
-                <a16:creationId xmlns:a16="http://schemas.microsoft.com/office/drawing/2014/main" id="{B16B9A2D-7550-9738-8BDF-F45827EFBF3B}"/>
-              </a:ext>
-            </a:extLst>
-          </p:cNvPr>
-          <p:cNvSpPr>
-            <a:spLocks noGrp="1"/>
-          </p:cNvSpPr>
-          <p:nvPr>
-            <p:ph idx="1"/>
-          </p:nvPr>
-        </p:nvSpPr>
-        <p:spPr>
-          <a:xfrm>
-            <a:off x="7311974" y="2015732"/>
-            <a:ext cx="4711150" cy="3767230"/>
-          </a:xfrm>
-        </p:spPr>
-        <p:txBody>
-          <a:bodyPr/>
-          <a:lstStyle/>
-          <a:p>
-            <a:r>
-              <a:rPr lang="en-US" dirty="0"/>
-              <a:t>The data varies from the mean – SST. </a:t>
-            </a:r>
-          </a:p>
-          <a:p>
-            <a:pPr lvl="1"/>
-            <a:r>
-              <a:rPr lang="en-US" dirty="0"/>
-              <a:t>Mean is baseline, departures vary away.</a:t>
-            </a:r>
-          </a:p>
-          <a:p>
-            <a:r>
-              <a:rPr lang="en-US" dirty="0"/>
-              <a:t>Some variance ’explained’ by the model. </a:t>
-            </a:r>
-          </a:p>
-          <a:p>
-            <a:pPr lvl="1"/>
-            <a:r>
-              <a:rPr lang="en-US" dirty="0"/>
-              <a:t>Model gets us close to the value. </a:t>
-            </a:r>
-          </a:p>
-          <a:p>
-            <a:r>
-              <a:rPr lang="en-US" dirty="0"/>
-              <a:t>The rest is the residual – error. </a:t>
-            </a:r>
-          </a:p>
-          <a:p>
-            <a:pPr lvl="1"/>
-            <a:r>
-              <a:rPr lang="en-US" dirty="0"/>
-              <a:t>The model got us closer, but we are still this far away. </a:t>
-            </a:r>
-          </a:p>
-          <a:p>
-            <a:r>
-              <a:rPr lang="en-US" dirty="0"/>
-              <a:t>The closer the model is, the more SSR. </a:t>
-            </a:r>
-          </a:p>
-        </p:txBody>
-      </p:sp>
-      <p:pic>
-        <p:nvPicPr>
-          <p:cNvPr id="4098" name="Picture 2" descr="Statistical Regression SSR / SSE / SST | Dr. Walid Soula | Artificial  Intelligence in Plain English">
-            <a:extLst>
-              <a:ext uri="{FF2B5EF4-FFF2-40B4-BE49-F238E27FC236}">
-                <a16:creationId xmlns:a16="http://schemas.microsoft.com/office/drawing/2014/main" id="{4E772850-0C7A-856C-3064-7B5F93AA8581}"/>
-              </a:ext>
-            </a:extLst>
-          </p:cNvPr>
-          <p:cNvPicPr>
-            <a:picLocks noChangeAspect="1" noChangeArrowheads="1"/>
-          </p:cNvPicPr>
-          <p:nvPr/>
-        </p:nvPicPr>
-        <p:blipFill>
-          <a:blip r:embed="rId2">
-            <a:extLst>
-              <a:ext uri="{28A0092B-C50C-407E-A947-70E740481C1C}">
-                <a14:useLocalDpi xmlns:a14="http://schemas.microsoft.com/office/drawing/2010/main" val="0"/>
-              </a:ext>
-            </a:extLst>
-          </a:blip>
-          <a:srcRect/>
-          <a:stretch>
-            <a:fillRect/>
-          </a:stretch>
-        </p:blipFill>
-        <p:spPr bwMode="auto">
-          <a:xfrm>
-            <a:off x="0" y="580767"/>
-            <a:ext cx="7311974" cy="5202195"/>
-          </a:xfrm>
-          <a:prstGeom prst="rect">
-            <a:avLst/>
-          </a:prstGeom>
-          <a:noFill/>
-          <a:extLst>
-            <a:ext uri="{909E8E84-426E-40DD-AFC4-6F175D3DCCD1}">
-              <a14:hiddenFill xmlns:a14="http://schemas.microsoft.com/office/drawing/2010/main">
-                <a:solidFill>
-                  <a:srgbClr val="FFFFFF"/>
-                </a:solidFill>
-              </a14:hiddenFill>
-            </a:ext>
-          </a:extLst>
-        </p:spPr>
-      </p:pic>
+            <a:off x="1451579" y="2015732"/>
+            <a:ext cx="9603275" cy="4037749"/>
+          </a:xfrm>
+        </p:spPr>
+        <p:txBody>
+          <a:bodyPr/>
+          <a:lstStyle/>
+          <a:p>
+            <a:r>
+              <a:rPr lang="en-US" dirty="0"/>
+              <a:t>In predictive modeling we often use a different metric for quality along with RMSE – R2. </a:t>
+            </a:r>
+          </a:p>
+          <a:p>
+            <a:r>
+              <a:rPr lang="en-US" dirty="0"/>
+              <a:t>R squared, or R2 is the coefficient of determination. </a:t>
+            </a:r>
+          </a:p>
+          <a:p>
+            <a:pPr lvl="1"/>
+            <a:r>
+              <a:rPr lang="en-US" dirty="0"/>
+              <a:t>This measures the amount of variance that is explained by the model. </a:t>
+            </a:r>
+          </a:p>
+          <a:p>
+            <a:pPr lvl="1"/>
+            <a:r>
+              <a:rPr lang="en-US" dirty="0"/>
+              <a:t>It is also the square of the correlation. </a:t>
+            </a:r>
+          </a:p>
+          <a:p>
+            <a:r>
+              <a:rPr lang="en-US" dirty="0"/>
+              <a:t>I think it is easiest to think of it in terms of variance, in a few steps. </a:t>
+            </a:r>
+          </a:p>
+        </p:txBody>
+      </p:sp>
     </p:spTree>
     <p:extLst>
       <p:ext uri="{BB962C8B-B14F-4D97-AF65-F5344CB8AC3E}">
-        <p14:creationId xmlns:p14="http://schemas.microsoft.com/office/powerpoint/2010/main" val="3181117461"/>
+        <p14:creationId xmlns:p14="http://schemas.microsoft.com/office/powerpoint/2010/main" val="2634301341"/>
       </p:ext>
     </p:extLst>
   </p:cSld>
@@ -7793,7 +8161,7 @@
           <p:cNvPr id="2" name="Title 1">
             <a:extLst>
               <a:ext uri="{FF2B5EF4-FFF2-40B4-BE49-F238E27FC236}">
-                <a16:creationId xmlns:a16="http://schemas.microsoft.com/office/drawing/2014/main" id="{0B18DCD2-1B99-D357-7072-1F6CD5A1CBC8}"/>
+                <a16:creationId xmlns:a16="http://schemas.microsoft.com/office/drawing/2014/main" id="{0507D6C5-A8AB-509C-41B6-10B5AF5271F7}"/>
               </a:ext>
             </a:extLst>
           </p:cNvPr>
@@ -7804,14 +8172,19 @@
             <p:ph type="title"/>
           </p:nvPr>
         </p:nvSpPr>
-        <p:spPr/>
-        <p:txBody>
-          <a:bodyPr/>
-          <a:lstStyle/>
-          <a:p>
-            <a:r>
-              <a:rPr lang="en-US" dirty="0"/>
-              <a:t>You can Frame it in Terms of Error as well</a:t>
+        <p:spPr>
+          <a:xfrm>
+            <a:off x="778477" y="804519"/>
+            <a:ext cx="10276378" cy="1049235"/>
+          </a:xfrm>
+        </p:spPr>
+        <p:txBody>
+          <a:bodyPr/>
+          <a:lstStyle/>
+          <a:p>
+            <a:r>
+              <a:rPr lang="en-US" dirty="0"/>
+              <a:t>Variance – Our data varies</a:t>
             </a:r>
           </a:p>
         </p:txBody>
@@ -7821,7 +8194,7 @@
           <p:cNvPr id="3" name="Content Placeholder 2">
             <a:extLst>
               <a:ext uri="{FF2B5EF4-FFF2-40B4-BE49-F238E27FC236}">
-                <a16:creationId xmlns:a16="http://schemas.microsoft.com/office/drawing/2014/main" id="{67F840EE-F9E4-5677-1216-938AEF04A85A}"/>
+                <a16:creationId xmlns:a16="http://schemas.microsoft.com/office/drawing/2014/main" id="{C18B5CDD-C7C6-04CD-AA50-BDA0EAE527F8}"/>
               </a:ext>
             </a:extLst>
           </p:cNvPr>
@@ -7834,45 +8207,76 @@
         </p:nvSpPr>
         <p:spPr>
           <a:xfrm>
-            <a:off x="8629822" y="2015732"/>
-            <a:ext cx="3319162" cy="3450613"/>
-          </a:xfrm>
-        </p:spPr>
-        <p:txBody>
-          <a:bodyPr/>
-          <a:lstStyle/>
-          <a:p>
-            <a:r>
-              <a:rPr lang="en-US" dirty="0"/>
-              <a:t>Deviation from mean is ‘wrong’. </a:t>
-            </a:r>
-          </a:p>
-          <a:p>
-            <a:r>
-              <a:rPr lang="en-US" dirty="0"/>
-              <a:t>Some error is captured by model. </a:t>
-            </a:r>
-          </a:p>
-          <a:p>
-            <a:r>
-              <a:rPr lang="en-US" dirty="0"/>
-              <a:t>The rest is residual. </a:t>
-            </a:r>
-          </a:p>
-          <a:p>
-            <a:r>
-              <a:rPr lang="en-US" dirty="0"/>
-              <a:t>I don’t like this thought model, personally. </a:t>
+            <a:off x="1201479" y="2015732"/>
+            <a:ext cx="9853375" cy="4037749"/>
+          </a:xfrm>
+        </p:spPr>
+        <p:txBody>
+          <a:bodyPr/>
+          <a:lstStyle/>
+          <a:p>
+            <a:r>
+              <a:rPr lang="en-US" dirty="0"/>
+              <a:t>We can think of our target, y, in terms of its variance. </a:t>
+            </a:r>
+          </a:p>
+          <a:p>
+            <a:pPr lvl="1"/>
+            <a:r>
+              <a:rPr lang="en-US" dirty="0"/>
+              <a:t>Y varies – it literally has different values for different x inputs. </a:t>
+            </a:r>
+          </a:p>
+          <a:p>
+            <a:pPr lvl="1"/>
+            <a:r>
+              <a:rPr lang="en-US" dirty="0"/>
+              <a:t>We can measure that amount of </a:t>
+            </a:r>
+            <a:r>
+              <a:rPr lang="en-US" dirty="0" err="1"/>
+              <a:t>varaiance</a:t>
+            </a:r>
+            <a:r>
+              <a:rPr lang="en-US" dirty="0"/>
+              <a:t> by measuring how far values are from the mean. </a:t>
+            </a:r>
+          </a:p>
+          <a:p>
+            <a:r>
+              <a:rPr lang="en-US" dirty="0"/>
+              <a:t>This is known as SST or sum of squares total. </a:t>
+            </a:r>
+          </a:p>
+          <a:p>
+            <a:pPr lvl="1"/>
+            <a:r>
+              <a:rPr lang="en-US" dirty="0"/>
+              <a:t>It’s also the top of the variance calculation. </a:t>
+            </a:r>
+          </a:p>
+          <a:p>
+            <a:pPr lvl="1"/>
+            <a:r>
+              <a:rPr lang="en-US" dirty="0"/>
+              <a:t>This measures how much the real values vary from the mean – a baseline. </a:t>
+            </a:r>
+          </a:p>
+          <a:p>
+            <a:pPr lvl="1"/>
+            <a:r>
+              <a:rPr lang="en-US" dirty="0"/>
+              <a:t>I.e. (thought model, not def.) the model is attempting to tell us Y, think of the default value for Y that it tells us to be the mean, this tells us how much the model must ‘move’ from that default. </a:t>
             </a:r>
           </a:p>
         </p:txBody>
       </p:sp>
       <p:pic>
         <p:nvPicPr>
-          <p:cNvPr id="6146" name="Picture 2" descr="Image by Author">
+          <p:cNvPr id="3074" name="Picture 2" descr="SST = SSR + SSE in regression ...">
             <a:extLst>
               <a:ext uri="{FF2B5EF4-FFF2-40B4-BE49-F238E27FC236}">
-                <a16:creationId xmlns:a16="http://schemas.microsoft.com/office/drawing/2014/main" id="{EE687224-B51E-635B-7D1B-8CAEC894C1CB}"/>
+                <a16:creationId xmlns:a16="http://schemas.microsoft.com/office/drawing/2014/main" id="{81384808-AB71-34AB-1FA1-CF4B9F5A7008}"/>
               </a:ext>
             </a:extLst>
           </p:cNvPr>
@@ -7896,8 +8300,8 @@
         </p:blipFill>
         <p:spPr bwMode="auto">
           <a:xfrm>
-            <a:off x="349422" y="1853754"/>
-            <a:ext cx="8280400" cy="4330700"/>
+            <a:off x="7264400" y="202754"/>
+            <a:ext cx="4927600" cy="1651000"/>
           </a:xfrm>
           <a:prstGeom prst="rect">
             <a:avLst/>
@@ -7917,7 +8321,7 @@
     </p:spTree>
     <p:extLst>
       <p:ext uri="{BB962C8B-B14F-4D97-AF65-F5344CB8AC3E}">
-        <p14:creationId xmlns:p14="http://schemas.microsoft.com/office/powerpoint/2010/main" val="2533776187"/>
+        <p14:creationId xmlns:p14="http://schemas.microsoft.com/office/powerpoint/2010/main" val="3189705387"/>
       </p:ext>
     </p:extLst>
   </p:cSld>
@@ -7949,7 +8353,7 @@
           <p:cNvPr id="2" name="Title 1">
             <a:extLst>
               <a:ext uri="{FF2B5EF4-FFF2-40B4-BE49-F238E27FC236}">
-                <a16:creationId xmlns:a16="http://schemas.microsoft.com/office/drawing/2014/main" id="{546F845D-D761-C583-138B-B059BBB3A3EF}"/>
+                <a16:creationId xmlns:a16="http://schemas.microsoft.com/office/drawing/2014/main" id="{7B5929C5-3292-71F4-42DC-C1786154E484}"/>
               </a:ext>
             </a:extLst>
           </p:cNvPr>
@@ -7960,14 +8364,19 @@
             <p:ph type="title"/>
           </p:nvPr>
         </p:nvSpPr>
-        <p:spPr/>
-        <p:txBody>
-          <a:bodyPr/>
-          <a:lstStyle/>
-          <a:p>
-            <a:r>
-              <a:rPr lang="en-US" dirty="0"/>
-              <a:t>So, R2…</a:t>
+        <p:spPr>
+          <a:xfrm>
+            <a:off x="7311974" y="804519"/>
+            <a:ext cx="3742880" cy="1049235"/>
+          </a:xfrm>
+        </p:spPr>
+        <p:txBody>
+          <a:bodyPr/>
+          <a:lstStyle/>
+          <a:p>
+            <a:r>
+              <a:rPr lang="en-US" dirty="0"/>
+              <a:t>Break that apart</a:t>
             </a:r>
           </a:p>
         </p:txBody>
@@ -7977,7 +8386,7 @@
           <p:cNvPr id="3" name="Content Placeholder 2">
             <a:extLst>
               <a:ext uri="{FF2B5EF4-FFF2-40B4-BE49-F238E27FC236}">
-                <a16:creationId xmlns:a16="http://schemas.microsoft.com/office/drawing/2014/main" id="{CB202270-26C3-412D-69BD-07D5441FFFF5}"/>
+                <a16:creationId xmlns:a16="http://schemas.microsoft.com/office/drawing/2014/main" id="{B16B9A2D-7550-9738-8BDF-F45827EFBF3B}"/>
               </a:ext>
             </a:extLst>
           </p:cNvPr>
@@ -7990,55 +8399,66 @@
         </p:nvSpPr>
         <p:spPr>
           <a:xfrm>
-            <a:off x="6935234" y="2015732"/>
-            <a:ext cx="5039832" cy="4037749"/>
-          </a:xfrm>
-        </p:spPr>
-        <p:txBody>
-          <a:bodyPr>
-            <a:normAutofit/>
-          </a:bodyPr>
-          <a:lstStyle/>
-          <a:p>
-            <a:r>
-              <a:rPr lang="en-US" dirty="0"/>
-              <a:t>R2 is the percentage of the total variance in Y (SST) that the model explains (SSR). </a:t>
-            </a:r>
-          </a:p>
-          <a:p>
-            <a:pPr lvl="1"/>
-            <a:r>
-              <a:rPr lang="en-US" dirty="0"/>
-              <a:t>I.e. the value of Y varies this much, our model explains this portion, the rest of the variance is stuff that we can’t explain. </a:t>
-            </a:r>
-          </a:p>
-          <a:p>
-            <a:pPr lvl="1"/>
-            <a:r>
-              <a:rPr lang="en-US" dirty="0"/>
-              <a:t>Our model tells us “this percentage” of the departure from the mean. </a:t>
-            </a:r>
-          </a:p>
-          <a:p>
-            <a:r>
-              <a:rPr lang="en-US" dirty="0"/>
-              <a:t>Between 0 and 1. </a:t>
-            </a:r>
-          </a:p>
-          <a:p>
-            <a:r>
-              <a:rPr lang="en-US" dirty="0"/>
-              <a:t>Comparable between scenarios/models. </a:t>
+            <a:off x="7311974" y="2015732"/>
+            <a:ext cx="4711150" cy="3767230"/>
+          </a:xfrm>
+        </p:spPr>
+        <p:txBody>
+          <a:bodyPr/>
+          <a:lstStyle/>
+          <a:p>
+            <a:r>
+              <a:rPr lang="en-US" dirty="0"/>
+              <a:t>The data varies from the mean – SST. </a:t>
+            </a:r>
+          </a:p>
+          <a:p>
+            <a:pPr lvl="1"/>
+            <a:r>
+              <a:rPr lang="en-US" dirty="0"/>
+              <a:t>Mean is baseline, departures vary away.</a:t>
+            </a:r>
+          </a:p>
+          <a:p>
+            <a:r>
+              <a:rPr lang="en-US" dirty="0"/>
+              <a:t>Some variance ’explained’ by the model. </a:t>
+            </a:r>
+          </a:p>
+          <a:p>
+            <a:pPr lvl="1"/>
+            <a:r>
+              <a:rPr lang="en-US" dirty="0"/>
+              <a:t>Model gets us close to the value. </a:t>
+            </a:r>
+          </a:p>
+          <a:p>
+            <a:r>
+              <a:rPr lang="en-US" dirty="0"/>
+              <a:t>The rest is the residual – error. </a:t>
+            </a:r>
+          </a:p>
+          <a:p>
+            <a:pPr lvl="1"/>
+            <a:r>
+              <a:rPr lang="en-US" dirty="0"/>
+              <a:t>The model got us closer, but we are still this far away. </a:t>
+            </a:r>
+          </a:p>
+          <a:p>
+            <a:r>
+              <a:rPr lang="en-US" dirty="0"/>
+              <a:t>The closer the model is, the more SSR. </a:t>
             </a:r>
           </a:p>
         </p:txBody>
       </p:sp>
       <p:pic>
         <p:nvPicPr>
-          <p:cNvPr id="5122" name="Picture 2" descr="Looking at R-Squared. In data science we create regression… | by Erika D | Medium">
+          <p:cNvPr id="4098" name="Picture 2" descr="Statistical Regression SSR / SSE / SST | Dr. Walid Soula | Artificial  Intelligence in Plain English">
             <a:extLst>
               <a:ext uri="{FF2B5EF4-FFF2-40B4-BE49-F238E27FC236}">
-                <a16:creationId xmlns:a16="http://schemas.microsoft.com/office/drawing/2014/main" id="{33E561D9-3B7E-D3D7-0E36-949D923B88A1}"/>
+                <a16:creationId xmlns:a16="http://schemas.microsoft.com/office/drawing/2014/main" id="{4E772850-0C7A-856C-3064-7B5F93AA8581}"/>
               </a:ext>
             </a:extLst>
           </p:cNvPr>
@@ -8062,8 +8482,8 @@
         </p:blipFill>
         <p:spPr bwMode="auto">
           <a:xfrm>
-            <a:off x="3793524" y="105164"/>
-            <a:ext cx="8299622" cy="1652359"/>
+            <a:off x="0" y="580767"/>
+            <a:ext cx="7311974" cy="5202195"/>
           </a:xfrm>
           <a:prstGeom prst="rect">
             <a:avLst/>
@@ -8080,57 +8500,10 @@
           </a:extLst>
         </p:spPr>
       </p:pic>
-      <p:pic>
-        <p:nvPicPr>
-          <p:cNvPr id="5124" name="Picture 4" descr="least squares - Why is $SST=SSE + SSR$? (One variable linear regression) -  Cross Validated">
-            <a:extLst>
-              <a:ext uri="{FF2B5EF4-FFF2-40B4-BE49-F238E27FC236}">
-                <a16:creationId xmlns:a16="http://schemas.microsoft.com/office/drawing/2014/main" id="{066960B9-F325-797F-3765-A430A18CEEF3}"/>
-              </a:ext>
-            </a:extLst>
-          </p:cNvPr>
-          <p:cNvPicPr>
-            <a:picLocks noChangeAspect="1" noChangeArrowheads="1"/>
-          </p:cNvPicPr>
-          <p:nvPr/>
-        </p:nvPicPr>
-        <p:blipFill>
-          <a:blip r:embed="rId3">
-            <a:extLst>
-              <a:ext uri="{28A0092B-C50C-407E-A947-70E740481C1C}">
-                <a14:useLocalDpi xmlns:a14="http://schemas.microsoft.com/office/drawing/2010/main" val="0"/>
-              </a:ext>
-            </a:extLst>
-          </a:blip>
-          <a:srcRect/>
-          <a:stretch>
-            <a:fillRect/>
-          </a:stretch>
-        </p:blipFill>
-        <p:spPr bwMode="auto">
-          <a:xfrm>
-            <a:off x="216934" y="2015732"/>
-            <a:ext cx="6718300" cy="3797300"/>
-          </a:xfrm>
-          <a:prstGeom prst="rect">
-            <a:avLst/>
-          </a:prstGeom>
-          <a:noFill/>
-          <a:extLst>
-            <a:ext uri="{909E8E84-426E-40DD-AFC4-6F175D3DCCD1}">
-              <a14:hiddenFill xmlns:a14="http://schemas.microsoft.com/office/drawing/2010/main">
-                <a:solidFill>
-                  <a:srgbClr val="FFFFFF"/>
-                </a:solidFill>
-              </a14:hiddenFill>
-            </a:ext>
-          </a:extLst>
-        </p:spPr>
-      </p:pic>
     </p:spTree>
     <p:extLst>
       <p:ext uri="{BB962C8B-B14F-4D97-AF65-F5344CB8AC3E}">
-        <p14:creationId xmlns:p14="http://schemas.microsoft.com/office/powerpoint/2010/main" val="696313299"/>
+        <p14:creationId xmlns:p14="http://schemas.microsoft.com/office/powerpoint/2010/main" val="3181117461"/>
       </p:ext>
     </p:extLst>
   </p:cSld>
